--- a/lecons/F2T/15_S09_L3_P5_Desert_Farming_Oases.pptx
+++ b/lecons/F2T/15_S09_L3_P5_Desert_Farming_Oases.pptx
@@ -57,9 +57,12 @@
     <p:sldId id="305" r:id="rId51"/>
     <p:sldId id="306" r:id="rId52"/>
     <p:sldId id="307" r:id="rId53"/>
+    <p:sldId id="308" r:id="rId54"/>
+    <p:sldId id="309" r:id="rId55"/>
+    <p:sldId id="310" r:id="rId56"/>
   </p:sldIdLst>
   <p:notesMasterIdLst>
-    <p:notesMasterId r:id="rId54"/>
+    <p:notesMasterId r:id="rId57"/>
   </p:notesMasterIdLst>
   <p:sldSz cx="12192000" cy="6858000"/>
   <p:notesSz cx="6858000" cy="12192000"/>
@@ -641,7 +644,7 @@
           <a:p>
             <a:r>
               <a:rPr lang="en-US" dirty="0"/>
-              <a:t>Listen carefully to this situation from real life. In the middle of the Sahara, travellers see a green place with tall palm trees and gardens. All around, there is only sand. Musa wonders how crops can grow there. Think about it, because I am going to ask you some questions.</a:t>
+              <a:t>Listen carefully to this situation from real life. In the middle of the Sahara, travellers see a green place with tall palm trees and gardens, while all around there is only sand. Musa asks: "How can crops grow in the middle of the desert?" Think about it, because I am going to ask you some questions.</a:t>
             </a:r>
             <a:endParaRPr lang="en-US" dirty="0"/>
           </a:p>
@@ -817,7 +820,7 @@
           <a:p>
             <a:r>
               <a:rPr lang="en-US" dirty="0"/>
-              <a:t>Good. Musa does not know how crops grow in the desert.</a:t>
+              <a:t>Good. Musa does not know how farming is possible in the desert.</a:t>
             </a:r>
             <a:endParaRPr lang="en-US" dirty="0"/>
           </a:p>
@@ -993,7 +996,7 @@
           <a:p>
             <a:r>
               <a:rPr lang="en-US" dirty="0"/>
-              <a:t>Good. Palm trees and gardens in the middle of the sand.</a:t>
+              <a:t>Good. Palm trees and gardens.</a:t>
             </a:r>
             <a:endParaRPr lang="en-US" dirty="0"/>
           </a:p>
@@ -1081,7 +1084,7 @@
           <a:p>
             <a:r>
               <a:rPr lang="en-US" dirty="0"/>
-              <a:t>Question 3: What do crops need to grow in the desert? Think for a moment, then raise your hand to answer.</a:t>
+              <a:t>Question 3: What is around this green place? Think for a moment, then raise your hand to answer.</a:t>
             </a:r>
             <a:endParaRPr lang="en-US" dirty="0"/>
           </a:p>
@@ -1169,7 +1172,7 @@
           <a:p>
             <a:r>
               <a:rPr lang="en-US" dirty="0"/>
-              <a:t>Good. Water.</a:t>
+              <a:t>Good. Only sand.</a:t>
             </a:r>
             <a:endParaRPr lang="en-US" dirty="0"/>
           </a:p>
@@ -1433,7 +1436,7 @@
           <a:p>
             <a:r>
               <a:rPr lang="en-US" dirty="0"/>
-              <a:t>Activity 1. Look carefully at this picture: an oasis in the Sahara. Observe every detail before I ask the question.</a:t>
+              <a:t>Activity 1. Look carefully at this picture: a green place in the desert. Observe every detail before I ask the question.</a:t>
             </a:r>
             <a:endParaRPr lang="en-US" dirty="0"/>
           </a:p>
@@ -1785,7 +1788,7 @@
           <a:p>
             <a:r>
               <a:rPr lang="en-US" dirty="0"/>
-              <a:t>Activity 2. Look carefully at this diagram: how an oasis gets its water. Observe every detail before I ask the question.</a:t>
+              <a:t>Activity 2. Look carefully at this diagram: how an oasis is formed. Observe every detail before I ask the question.</a:t>
             </a:r>
             <a:endParaRPr lang="en-US" dirty="0"/>
           </a:p>
@@ -1961,7 +1964,7 @@
           <a:p>
             <a:r>
               <a:rPr lang="en-US" dirty="0"/>
-              <a:t>Let us check the answer together. From rain on far hills. It moves under the ground and comes up.</a:t>
+              <a:t>Let us check the answer together. From rain on far hills that moves under the ground.</a:t>
             </a:r>
             <a:endParaRPr lang="en-US" dirty="0"/>
           </a:p>
@@ -2049,7 +2052,7 @@
           <a:p>
             <a:r>
               <a:rPr lang="en-US" dirty="0"/>
-              <a:t>Activity 3. Look carefully at this diagram: the three layers of crops in an oasis. Observe every detail before I ask the question.</a:t>
+              <a:t>Activity 3. Look carefully at this diagram: layers of crops in an oasis. Observe every detail before I ask the question.</a:t>
             </a:r>
             <a:endParaRPr lang="en-US" dirty="0"/>
           </a:p>
@@ -2137,7 +2140,7 @@
           <a:p>
             <a:r>
               <a:rPr lang="en-US" dirty="0"/>
-              <a:t>Here is the question for Activity 3: Name the three layers of crops. Why do farmers grow crops under the palms? Take one minute to think and write your answer in your rough notebook.</a:t>
+              <a:t>Here is the question for Activity 3: Why do farmers grow crops under the palms? Take one minute to think and write your answer in your rough notebook.</a:t>
             </a:r>
             <a:endParaRPr lang="en-US" dirty="0"/>
           </a:p>
@@ -2225,7 +2228,7 @@
           <a:p>
             <a:r>
               <a:rPr lang="en-US" dirty="0"/>
-              <a:t>Let us check the answer together. Date palms, fruit trees, vegetables. The palms give shade and keep the soil wet.</a:t>
+              <a:t>Let us check the answer together. The palms give shade and keep the soil wet.</a:t>
             </a:r>
             <a:endParaRPr lang="en-US" dirty="0"/>
           </a:p>
@@ -2313,7 +2316,7 @@
           <a:p>
             <a:r>
               <a:rPr lang="en-US" dirty="0"/>
-              <a:t>Activity 4. Look carefully at this picture: a shaduf in Egypt. Observe every detail before I ask the question.</a:t>
+              <a:t>Activity 4. Look carefully at this picture: lifting water. Observe every detail before I ask the question.</a:t>
             </a:r>
             <a:endParaRPr lang="en-US" dirty="0"/>
           </a:p>
@@ -2401,7 +2404,7 @@
           <a:p>
             <a:r>
               <a:rPr lang="en-US" dirty="0"/>
-              <a:t>Here is the question for Activity 4: What does this farmer use to lift water from the river? Take one minute to think and write your answer in your rough notebook.</a:t>
+              <a:t>Here is the question for Activity 4: What does this farmer use to lift water? Take one minute to think and write your answer in your rough notebook.</a:t>
             </a:r>
             <a:endParaRPr lang="en-US" dirty="0"/>
           </a:p>
@@ -2577,7 +2580,7 @@
           <a:p>
             <a:r>
               <a:rPr lang="en-US" dirty="0"/>
-              <a:t>Let us check the answer together. A shaduf: a long pole with a bucket.</a:t>
+              <a:t>Let us check the answer together. A shaduf.</a:t>
             </a:r>
             <a:endParaRPr lang="en-US" dirty="0"/>
           </a:p>
@@ -2665,7 +2668,7 @@
           <a:p>
             <a:r>
               <a:rPr lang="en-US" dirty="0"/>
-              <a:t>Activity 5. Look carefully at this picture: round fields watered by machines, seen from the sky. Observe every detail before I ask the question.</a:t>
+              <a:t>Activity 5. Look carefully at this picture: modern irrigation. Observe every detail before I ask the question.</a:t>
             </a:r>
             <a:endParaRPr lang="en-US" dirty="0"/>
           </a:p>
@@ -2753,7 +2756,7 @@
           <a:p>
             <a:r>
               <a:rPr lang="en-US" dirty="0"/>
-              <a:t>Here is the question for Activity 5: How do modern farmers get water in the desert? Take one minute to think and write your answer in your rough notebook.</a:t>
+              <a:t>Here is the question for Activity 5: Where do modern farmers get water in the desert? Take one minute to think and write your answer in your rough notebook.</a:t>
             </a:r>
             <a:endParaRPr lang="en-US" dirty="0"/>
           </a:p>
@@ -2841,7 +2844,7 @@
           <a:p>
             <a:r>
               <a:rPr lang="en-US" dirty="0"/>
-              <a:t>Let us check the answer together. They pump water from deep wells (boreholes).</a:t>
+              <a:t>Let us check the answer together. From deep wells (boreholes).</a:t>
             </a:r>
             <a:endParaRPr lang="en-US" dirty="0"/>
           </a:p>
@@ -3017,7 +3020,7 @@
           <a:p>
             <a:r>
               <a:rPr lang="en-US" dirty="0"/>
-              <a:t>Let us copy The Oasis. The oasis is explained as follows. On this slide we have Oasis and Formation. Write each point on a new line, with the key term first, and explain it in your own words when we revise. When you finish, we go to the next slide.</a:t>
+              <a:t>Let us copy the definitions. The key terms of this lesson are defined as follows. On this slide we have Oasis and Irrigation. Write each point on a new line, with the key term first, and explain it in your own words when we revise.</a:t>
             </a:r>
             <a:endParaRPr lang="en-US" dirty="0"/>
           </a:p>
@@ -3105,7 +3108,7 @@
           <a:p>
             <a:r>
               <a:rPr lang="en-US" dirty="0"/>
-              <a:t>We continue with The Oasis. On this slide we have Examples. Write each point on a new line, with the key term first, and explain it in your own words when we revise.</a:t>
+              <a:t>Let us copy Formation of Oases. Oases are formed as follows. Copy the point on Rain on far hills on the left, then draw the diagram on the right: how an oasis forms. Give it a title and label it clearly.</a:t>
             </a:r>
             <a:endParaRPr lang="en-US" dirty="0"/>
           </a:p>
@@ -3193,7 +3196,7 @@
           <a:p>
             <a:r>
               <a:rPr lang="en-US" dirty="0"/>
-              <a:t>Now draw this illustration in your notebook: formation of an oasis. Give it a title and label it clearly.</a:t>
+              <a:t>We continue with Formation of Oases. On this slide we have Underground water and Water at the surface. Write each point on a new line, with the key term first, and explain it in your own words when we revise.</a:t>
             </a:r>
             <a:endParaRPr lang="en-US" dirty="0"/>
           </a:p>
@@ -3281,7 +3284,7 @@
           <a:p>
             <a:r>
               <a:rPr lang="en-US" dirty="0"/>
-              <a:t>Let us copy Farming around Oases. Farming around oases is carried out as follows. On this slide we have Three layers and Irrigation methods. Write each point on a new line, with the key term first, and explain it in your own words when we revise. When you finish, we go to the next slide.</a:t>
+              <a:t>Let us copy Farming around Oases. Oasis farming has the following characteristics. Copy the point on Date palms on the left, then draw the diagram on the right: crops in an oasis. Give it a title and label it clearly.</a:t>
             </a:r>
             <a:endParaRPr lang="en-US" dirty="0"/>
           </a:p>
@@ -3369,7 +3372,7 @@
           <a:p>
             <a:r>
               <a:rPr lang="en-US" dirty="0"/>
-              <a:t>We continue with Farming around Oases. On this slide we have The Nile valley and Problems. Write each point on a new line, with the key term first, and explain it in your own words when we revise.</a:t>
+              <a:t>We continue with Farming around Oases. On this slide we have Fruit trees, Vegetables and cereals and Animals. Write each point on a new line, with the key term first, and explain it in your own words when we revise.</a:t>
             </a:r>
             <a:endParaRPr lang="en-US" dirty="0"/>
           </a:p>
@@ -3545,7 +3548,7 @@
           <a:p>
             <a:r>
               <a:rPr lang="en-US" dirty="0"/>
-              <a:t>Now let us check what you have understood. Question 1: What is an oasis? Answer in your exercise book.</a:t>
+              <a:t>Let us copy Irrigation in Deserts. Water is brought to crops in the following ways. Copy the point on Shaduf on the left, then draw the diagram on the right: a shaduf. Give it a title and label it clearly.</a:t>
             </a:r>
             <a:endParaRPr lang="en-US" dirty="0"/>
           </a:p>
@@ -3633,7 +3636,7 @@
           <a:p>
             <a:r>
               <a:rPr lang="en-US" dirty="0"/>
-              <a:t>The expected answer is: a green place in the desert where there is water. If you got it right, well done.</a:t>
+              <a:t>We continue with Irrigation in Deserts. On this slide we have Wells and boreholes and Dams and canals. Write each point on a new line, with the key term first, and explain it in your own words when we revise.</a:t>
             </a:r>
             <a:endParaRPr lang="en-US" dirty="0"/>
           </a:p>
@@ -3721,7 +3724,7 @@
           <a:p>
             <a:r>
               <a:rPr lang="en-US" dirty="0"/>
-              <a:t>Now let us check what you have understood. Question 2: Name two ways to get water in an oasis. Answer in your exercise book.</a:t>
+              <a:t>Copy the point on Modern sprinklers on the left, then draw the diagram on the right: modern irrigation. Give it a title and label it clearly.</a:t>
             </a:r>
             <a:endParaRPr lang="en-US" dirty="0"/>
           </a:p>
@@ -3809,7 +3812,7 @@
           <a:p>
             <a:r>
               <a:rPr lang="en-US" dirty="0"/>
-              <a:t>The expected answer is: wells and the shaduf (or pumps). If you got it right, well done.</a:t>
+              <a:t>Now let us check what you have understood. Question 1: What is an oasis? Answer in your exercise book.</a:t>
             </a:r>
             <a:endParaRPr lang="en-US" dirty="0"/>
           </a:p>
@@ -3897,7 +3900,7 @@
           <a:p>
             <a:r>
               <a:rPr lang="en-US" dirty="0"/>
-              <a:t>Take your time to copy this part; we will continue together.</a:t>
+              <a:t>The expected answer is: a green place in the desert where there is water. If you got it right, well done.</a:t>
             </a:r>
             <a:endParaRPr lang="en-US" dirty="0"/>
           </a:p>
@@ -3985,7 +3988,7 @@
           <a:p>
             <a:r>
               <a:rPr lang="en-US" dirty="0"/>
-              <a:t>For those who need more practice, fill in the blanks in your exercise book. The answers are: number 1, oasis; number 2, palm; number 3, shaduf.</a:t>
+              <a:t>Now let us check what you have understood. Question 2: Name two ways to get water in an oasis. Answer in your exercise book.</a:t>
             </a:r>
             <a:endParaRPr lang="en-US" dirty="0"/>
           </a:p>
@@ -4073,7 +4076,7 @@
           <a:p>
             <a:r>
               <a:rPr lang="en-US" dirty="0"/>
-              <a:t>For your homework: Look at a world map in your atlas. Find two countries located between 30° and 60° north of the Equator, and write their names. We shall correct it at the beginning of our next lesson.</a:t>
+              <a:t>The expected answer is: wells and the shaduf (or pumps). If you got it right, well done.</a:t>
             </a:r>
             <a:endParaRPr lang="en-US" dirty="0"/>
           </a:p>
@@ -4161,7 +4164,7 @@
           <a:p>
             <a:r>
               <a:rPr lang="en-US" dirty="0"/>
-              <a:t>Our next lesson will be on Lesson 4 (Part 1): The Temperate Region: Location, Types and Characteristics (Climate). Thank you for your attention, and see you next time.</a:t>
+              <a:t>Take your time to copy this part; we will continue together.</a:t>
             </a:r>
             <a:endParaRPr lang="en-US" dirty="0"/>
           </a:p>
@@ -4249,7 +4252,7 @@
           <a:p>
             <a:r>
               <a:rPr lang="en-US" dirty="0"/>
-              <a:t>Let us play the bilingual game. I say a word in English, and you give me the French word. Then we do the reverse.</a:t>
+              <a:t>For those who need more practice, fill in the blanks in your exercise book. The answers are: number 1, oasis; number 2, palm; number 3, shaduf.</a:t>
             </a:r>
             <a:endParaRPr lang="en-US" dirty="0"/>
           </a:p>
@@ -4337,7 +4340,7 @@
           <a:p>
             <a:r>
               <a:rPr lang="en-US" dirty="0"/>
-              <a:t>I record this information in the official logbook of the class after the lesson.</a:t>
+              <a:t>For your homework: Look at a world map in your atlas. Find two countries located between 30° and 60° north of the Equator, and write their names. We shall correct it at the beginning of our next lesson.</a:t>
             </a:r>
             <a:endParaRPr lang="en-US" dirty="0"/>
           </a:p>
@@ -4513,7 +4516,7 @@
           <a:p>
             <a:r>
               <a:rPr lang="en-US" dirty="0"/>
-              <a:t>I complete the second page of the logbook: the matter taught, the evaluation, the homework and the attendance.</a:t>
+              <a:t>Our next lesson will be on Lesson 4 (Part 1): The Temperate Region: Location, Types and Characteristics (Climate). Thank you for your attention, and see you next time.</a:t>
             </a:r>
             <a:endParaRPr lang="en-US" dirty="0"/>
           </a:p>
@@ -4601,7 +4604,7 @@
           <a:p>
             <a:r>
               <a:rPr lang="en-US" dirty="0"/>
-              <a:t>This slide is for me, the teacher: it gives the timing of the lesson and what to do if the projector is not available.</a:t>
+              <a:t>Let us play the bilingual game. I say a word in English, and you give me the French word. Then we do the reverse.</a:t>
             </a:r>
             <a:endParaRPr lang="en-US" dirty="0"/>
           </a:p>
@@ -4689,7 +4692,7 @@
           <a:p>
             <a:r>
               <a:rPr lang="en-US" dirty="0"/>
-              <a:t>These are the references and picture credits used to prepare this lesson.</a:t>
+              <a:t>I record this information in the official logbook of the class after the lesson.</a:t>
             </a:r>
             <a:endParaRPr lang="en-US" dirty="0"/>
           </a:p>
@@ -4713,6 +4716,270 @@
             <a:fld id="{F7021451-1387-4CA6-816F-3879F97B5CBC}" type="slidenum">
               <a:rPr lang="en-US"/>
               <a:t>52</a:t>
+            </a:fld>
+            <a:endParaRPr lang="en-US"/>
+          </a:p>
+        </p:txBody>
+      </p:sp>
+    </p:spTree>
+    <p:extLst>
+      <p:ext uri="{BB962C8B-B14F-4D97-AF65-F5344CB8AC3E}">
+        <p14:creationId xmlns:p14="http://schemas.microsoft.com/office/powerpoint/2010/main" val="1024086991"/>
+      </p:ext>
+    </p:extLst>
+  </p:cSld>
+  <p:clrMapOvr>
+    <a:masterClrMapping/>
+  </p:clrMapOvr>
+</p:notes>
+</file>
+
+<file path=ppt/notesSlides/notesSlide53.xml><?xml version="1.0" encoding="utf-8"?>
+<p:notes xmlns:a="http://schemas.openxmlformats.org/drawingml/2006/main" xmlns:r="http://schemas.openxmlformats.org/officeDocument/2006/relationships" xmlns:p="http://schemas.openxmlformats.org/presentationml/2006/main">
+  <p:cSld>
+    <p:spTree>
+      <p:nvGrpSpPr>
+        <p:cNvPr id="1" name=""/>
+        <p:cNvGrpSpPr/>
+        <p:nvPr/>
+      </p:nvGrpSpPr>
+      <p:grpSpPr>
+        <a:xfrm>
+          <a:off x="0" y="0"/>
+          <a:ext cx="0" cy="0"/>
+          <a:chOff x="0" y="0"/>
+          <a:chExt cx="0" cy="0"/>
+        </a:xfrm>
+      </p:grpSpPr>
+      <p:sp>
+        <p:nvSpPr>
+          <p:cNvPr id="2" name="Slide Image Placeholder 1"/>
+          <p:cNvSpPr>
+            <a:spLocks noGrp="1" noRot="1" noChangeAspect="1"/>
+          </p:cNvSpPr>
+          <p:nvPr>
+            <p:ph type="sldImg"/>
+          </p:nvPr>
+        </p:nvSpPr>
+        <p:spPr/>
+      </p:sp>
+      <p:sp>
+        <p:nvSpPr>
+          <p:cNvPr id="3" name="Notes Placeholder 2"/>
+          <p:cNvSpPr>
+            <a:spLocks noGrp="1"/>
+          </p:cNvSpPr>
+          <p:nvPr>
+            <p:ph type="body" idx="1"/>
+          </p:nvPr>
+        </p:nvSpPr>
+        <p:spPr/>
+        <p:txBody>
+          <a:bodyPr/>
+          <a:lstStyle/>
+          <a:p>
+            <a:r>
+              <a:rPr lang="en-US" dirty="0"/>
+              <a:t>I complete the second page of the logbook: the matter taught, the evaluation, the homework and the attendance.</a:t>
+            </a:r>
+            <a:endParaRPr lang="en-US" dirty="0"/>
+          </a:p>
+        </p:txBody>
+      </p:sp>
+      <p:sp>
+        <p:nvSpPr>
+          <p:cNvPr id="4" name="Slide Number Placeholder 3"/>
+          <p:cNvSpPr>
+            <a:spLocks noGrp="1"/>
+          </p:cNvSpPr>
+          <p:nvPr>
+            <p:ph type="sldNum" sz="quarter" idx="10"/>
+          </p:nvPr>
+        </p:nvSpPr>
+        <p:spPr/>
+        <p:txBody>
+          <a:bodyPr/>
+          <a:lstStyle/>
+          <a:p>
+            <a:fld id="{F7021451-1387-4CA6-816F-3879F97B5CBC}" type="slidenum">
+              <a:rPr lang="en-US"/>
+              <a:t>53</a:t>
+            </a:fld>
+            <a:endParaRPr lang="en-US"/>
+          </a:p>
+        </p:txBody>
+      </p:sp>
+    </p:spTree>
+    <p:extLst>
+      <p:ext uri="{BB962C8B-B14F-4D97-AF65-F5344CB8AC3E}">
+        <p14:creationId xmlns:p14="http://schemas.microsoft.com/office/powerpoint/2010/main" val="1024086991"/>
+      </p:ext>
+    </p:extLst>
+  </p:cSld>
+  <p:clrMapOvr>
+    <a:masterClrMapping/>
+  </p:clrMapOvr>
+</p:notes>
+</file>
+
+<file path=ppt/notesSlides/notesSlide54.xml><?xml version="1.0" encoding="utf-8"?>
+<p:notes xmlns:a="http://schemas.openxmlformats.org/drawingml/2006/main" xmlns:r="http://schemas.openxmlformats.org/officeDocument/2006/relationships" xmlns:p="http://schemas.openxmlformats.org/presentationml/2006/main">
+  <p:cSld>
+    <p:spTree>
+      <p:nvGrpSpPr>
+        <p:cNvPr id="1" name=""/>
+        <p:cNvGrpSpPr/>
+        <p:nvPr/>
+      </p:nvGrpSpPr>
+      <p:grpSpPr>
+        <a:xfrm>
+          <a:off x="0" y="0"/>
+          <a:ext cx="0" cy="0"/>
+          <a:chOff x="0" y="0"/>
+          <a:chExt cx="0" cy="0"/>
+        </a:xfrm>
+      </p:grpSpPr>
+      <p:sp>
+        <p:nvSpPr>
+          <p:cNvPr id="2" name="Slide Image Placeholder 1"/>
+          <p:cNvSpPr>
+            <a:spLocks noGrp="1" noRot="1" noChangeAspect="1"/>
+          </p:cNvSpPr>
+          <p:nvPr>
+            <p:ph type="sldImg"/>
+          </p:nvPr>
+        </p:nvSpPr>
+        <p:spPr/>
+      </p:sp>
+      <p:sp>
+        <p:nvSpPr>
+          <p:cNvPr id="3" name="Notes Placeholder 2"/>
+          <p:cNvSpPr>
+            <a:spLocks noGrp="1"/>
+          </p:cNvSpPr>
+          <p:nvPr>
+            <p:ph type="body" idx="1"/>
+          </p:nvPr>
+        </p:nvSpPr>
+        <p:spPr/>
+        <p:txBody>
+          <a:bodyPr/>
+          <a:lstStyle/>
+          <a:p>
+            <a:r>
+              <a:rPr lang="en-US" dirty="0"/>
+              <a:t>This slide is for me, the teacher: it gives the timing of the lesson and what to do if the projector is not available.</a:t>
+            </a:r>
+            <a:endParaRPr lang="en-US" dirty="0"/>
+          </a:p>
+        </p:txBody>
+      </p:sp>
+      <p:sp>
+        <p:nvSpPr>
+          <p:cNvPr id="4" name="Slide Number Placeholder 3"/>
+          <p:cNvSpPr>
+            <a:spLocks noGrp="1"/>
+          </p:cNvSpPr>
+          <p:nvPr>
+            <p:ph type="sldNum" sz="quarter" idx="10"/>
+          </p:nvPr>
+        </p:nvSpPr>
+        <p:spPr/>
+        <p:txBody>
+          <a:bodyPr/>
+          <a:lstStyle/>
+          <a:p>
+            <a:fld id="{F7021451-1387-4CA6-816F-3879F97B5CBC}" type="slidenum">
+              <a:rPr lang="en-US"/>
+              <a:t>54</a:t>
+            </a:fld>
+            <a:endParaRPr lang="en-US"/>
+          </a:p>
+        </p:txBody>
+      </p:sp>
+    </p:spTree>
+    <p:extLst>
+      <p:ext uri="{BB962C8B-B14F-4D97-AF65-F5344CB8AC3E}">
+        <p14:creationId xmlns:p14="http://schemas.microsoft.com/office/powerpoint/2010/main" val="1024086991"/>
+      </p:ext>
+    </p:extLst>
+  </p:cSld>
+  <p:clrMapOvr>
+    <a:masterClrMapping/>
+  </p:clrMapOvr>
+</p:notes>
+</file>
+
+<file path=ppt/notesSlides/notesSlide55.xml><?xml version="1.0" encoding="utf-8"?>
+<p:notes xmlns:a="http://schemas.openxmlformats.org/drawingml/2006/main" xmlns:r="http://schemas.openxmlformats.org/officeDocument/2006/relationships" xmlns:p="http://schemas.openxmlformats.org/presentationml/2006/main">
+  <p:cSld>
+    <p:spTree>
+      <p:nvGrpSpPr>
+        <p:cNvPr id="1" name=""/>
+        <p:cNvGrpSpPr/>
+        <p:nvPr/>
+      </p:nvGrpSpPr>
+      <p:grpSpPr>
+        <a:xfrm>
+          <a:off x="0" y="0"/>
+          <a:ext cx="0" cy="0"/>
+          <a:chOff x="0" y="0"/>
+          <a:chExt cx="0" cy="0"/>
+        </a:xfrm>
+      </p:grpSpPr>
+      <p:sp>
+        <p:nvSpPr>
+          <p:cNvPr id="2" name="Slide Image Placeholder 1"/>
+          <p:cNvSpPr>
+            <a:spLocks noGrp="1" noRot="1" noChangeAspect="1"/>
+          </p:cNvSpPr>
+          <p:nvPr>
+            <p:ph type="sldImg"/>
+          </p:nvPr>
+        </p:nvSpPr>
+        <p:spPr/>
+      </p:sp>
+      <p:sp>
+        <p:nvSpPr>
+          <p:cNvPr id="3" name="Notes Placeholder 2"/>
+          <p:cNvSpPr>
+            <a:spLocks noGrp="1"/>
+          </p:cNvSpPr>
+          <p:nvPr>
+            <p:ph type="body" idx="1"/>
+          </p:nvPr>
+        </p:nvSpPr>
+        <p:spPr/>
+        <p:txBody>
+          <a:bodyPr/>
+          <a:lstStyle/>
+          <a:p>
+            <a:r>
+              <a:rPr lang="en-US" dirty="0"/>
+              <a:t>These are the references and picture credits used to prepare this lesson.</a:t>
+            </a:r>
+            <a:endParaRPr lang="en-US" dirty="0"/>
+          </a:p>
+        </p:txBody>
+      </p:sp>
+      <p:sp>
+        <p:nvSpPr>
+          <p:cNvPr id="4" name="Slide Number Placeholder 3"/>
+          <p:cNvSpPr>
+            <a:spLocks noGrp="1"/>
+          </p:cNvSpPr>
+          <p:nvPr>
+            <p:ph type="sldNum" sz="quarter" idx="10"/>
+          </p:nvPr>
+        </p:nvSpPr>
+        <p:spPr/>
+        <p:txBody>
+          <a:bodyPr/>
+          <a:lstStyle/>
+          <a:p>
+            <a:fld id="{F7021451-1387-4CA6-816F-3879F97B5CBC}" type="slidenum">
+              <a:rPr lang="en-US"/>
+              <a:t>55</a:t>
             </a:fld>
             <a:endParaRPr lang="en-US"/>
           </a:p>
@@ -4953,7 +5220,7 @@
           <a:p>
             <a:r>
               <a:rPr lang="en-US" dirty="0"/>
-              <a:t>By the end of this lesson, you should be able to do three things. Number 1: explain how an oasis is formed. Number 2: describe the crops grown in oases. Number 3: describe the methods of irrigation used in deserts. Number 4: identify the problems of oasis farming.</a:t>
+              <a:t>By the end of this lesson, you should be able to do four things. Number 1: explain how an oasis is formed. Number 2: describe the crops grown in oases. Number 3: describe the methods of irrigation used in deserts. Number 4: identify the problems of oasis farming.</a:t>
             </a:r>
             <a:endParaRPr lang="en-US" dirty="0"/>
           </a:p>
@@ -6505,7 +6772,7 @@
                 <a:ea typeface="Times New Roman" pitchFamily="34" charset="-122"/>
                 <a:cs typeface="Times New Roman" pitchFamily="34" charset="-120"/>
               </a:rPr>
-              <a:t>In the middle of the Sahara, travellers see a green place with tall palm trees and gardens. All around, there is only sand. Musa wonders how crops can grow there.</a:t>
+              <a:t>In the middle of the Sahara, travellers see a green place with tall palm trees and gardens, while all around there is only sand. Musa asks: "How can crops grow in the middle of the desert?"</a:t>
             </a:r>
             <a:endParaRPr lang="en-US" sz="4000" dirty="0"/>
           </a:p>
@@ -6943,7 +7210,7 @@
                 <a:ea typeface="Times New Roman" pitchFamily="34" charset="-122"/>
                 <a:cs typeface="Times New Roman" pitchFamily="34" charset="-120"/>
               </a:rPr>
-              <a:t>Musa does not know how crops grow in the desert.</a:t>
+              <a:t>Musa does not know how farming is possible in the desert.</a:t>
             </a:r>
             <a:endParaRPr lang="en-US" sz="4000" dirty="0"/>
           </a:p>
@@ -7381,7 +7648,7 @@
                 <a:ea typeface="Times New Roman" pitchFamily="34" charset="-122"/>
                 <a:cs typeface="Times New Roman" pitchFamily="34" charset="-120"/>
               </a:rPr>
-              <a:t>Palm trees and gardens in the middle of the sand.</a:t>
+              <a:t>Palm trees and gardens.</a:t>
             </a:r>
             <a:endParaRPr lang="en-US" sz="4000" dirty="0"/>
           </a:p>
@@ -7600,7 +7867,7 @@
                 <a:ea typeface="Times New Roman" pitchFamily="34" charset="-122"/>
                 <a:cs typeface="Times New Roman" pitchFamily="34" charset="-120"/>
               </a:rPr>
-              <a:t>What do crops need to grow in the desert?</a:t>
+              <a:t>What is around this green place?</a:t>
             </a:r>
             <a:endParaRPr lang="en-US" sz="4000" dirty="0"/>
           </a:p>
@@ -7819,7 +8086,7 @@
                 <a:ea typeface="Times New Roman" pitchFamily="34" charset="-122"/>
                 <a:cs typeface="Times New Roman" pitchFamily="34" charset="-120"/>
               </a:rPr>
-              <a:t>Water.</a:t>
+              <a:t>Only sand.</a:t>
             </a:r>
             <a:endParaRPr lang="en-US" sz="4000" dirty="0"/>
           </a:p>
@@ -8369,7 +8636,7 @@
                 <a:ea typeface="Calibri" pitchFamily="34" charset="-122"/>
                 <a:cs typeface="Calibri" pitchFamily="34" charset="-120"/>
               </a:rPr>
-              <a:t>1. THE OASIS</a:t>
+              <a:t>1. OASES</a:t>
             </a:r>
             <a:endParaRPr lang="en-US" sz="1400" dirty="0"/>
           </a:p>
@@ -8471,7 +8738,7 @@
                 <a:ea typeface="Times New Roman" pitchFamily="34" charset="-122"/>
                 <a:cs typeface="Times New Roman" pitchFamily="34" charset="-120"/>
               </a:rPr>
-              <a:t>An oasis in the Sahara.</a:t>
+              <a:t>A green place in the desert.</a:t>
             </a:r>
             <a:endParaRPr lang="en-US" sz="1800" dirty="0"/>
           </a:p>
@@ -9178,7 +9445,7 @@
                 <a:ea typeface="Calibri" pitchFamily="34" charset="-122"/>
                 <a:cs typeface="Calibri" pitchFamily="34" charset="-120"/>
               </a:rPr>
-              <a:t>1. THE OASIS</a:t>
+              <a:t>1. OASES</a:t>
             </a:r>
             <a:endParaRPr lang="en-US" sz="1400" dirty="0"/>
           </a:p>
@@ -9397,7 +9664,7 @@
                 <a:ea typeface="Calibri" pitchFamily="34" charset="-122"/>
                 <a:cs typeface="Calibri" pitchFamily="34" charset="-120"/>
               </a:rPr>
-              <a:t>1. THE OASIS</a:t>
+              <a:t>1. OASES</a:t>
             </a:r>
             <a:endParaRPr lang="en-US" sz="1400" dirty="0"/>
           </a:p>
@@ -9616,7 +9883,7 @@
                 <a:ea typeface="Calibri" pitchFamily="34" charset="-122"/>
                 <a:cs typeface="Calibri" pitchFamily="34" charset="-120"/>
               </a:rPr>
-              <a:t>1. THE OASIS</a:t>
+              <a:t>1. OASES</a:t>
             </a:r>
             <a:endParaRPr lang="en-US" sz="1400" dirty="0"/>
           </a:p>
@@ -9718,7 +9985,7 @@
                 <a:ea typeface="Times New Roman" pitchFamily="34" charset="-122"/>
                 <a:cs typeface="Times New Roman" pitchFamily="34" charset="-120"/>
               </a:rPr>
-              <a:t>How an oasis gets its water.</a:t>
+              <a:t>How an oasis is formed.</a:t>
             </a:r>
             <a:endParaRPr lang="en-US" sz="1800" dirty="0"/>
           </a:p>
@@ -9830,7 +10097,7 @@
                 <a:ea typeface="Calibri" pitchFamily="34" charset="-122"/>
                 <a:cs typeface="Calibri" pitchFamily="34" charset="-120"/>
               </a:rPr>
-              <a:t>1. THE OASIS</a:t>
+              <a:t>1. OASES</a:t>
             </a:r>
             <a:endParaRPr lang="en-US" sz="1400" dirty="0"/>
           </a:p>
@@ -10049,7 +10316,7 @@
                 <a:ea typeface="Calibri" pitchFamily="34" charset="-122"/>
                 <a:cs typeface="Calibri" pitchFamily="34" charset="-120"/>
               </a:rPr>
-              <a:t>1. THE OASIS</a:t>
+              <a:t>1. OASES</a:t>
             </a:r>
             <a:endParaRPr lang="en-US" sz="1400" dirty="0"/>
           </a:p>
@@ -10156,7 +10423,7 @@
                 <a:ea typeface="Times New Roman" pitchFamily="34" charset="-122"/>
                 <a:cs typeface="Times New Roman" pitchFamily="34" charset="-120"/>
               </a:rPr>
-              <a:t>From rain on far hills. It moves under the ground and comes up.</a:t>
+              <a:t>From rain on far hills that moves under the ground.</a:t>
             </a:r>
             <a:endParaRPr lang="en-US" sz="4000" dirty="0"/>
           </a:p>
@@ -10268,7 +10535,7 @@
                 <a:ea typeface="Calibri" pitchFamily="34" charset="-122"/>
                 <a:cs typeface="Calibri" pitchFamily="34" charset="-120"/>
               </a:rPr>
-              <a:t>2. FARMING AROUND OASES</a:t>
+              <a:t>2. OASIS FARMING</a:t>
             </a:r>
             <a:endParaRPr lang="en-US" sz="1400" dirty="0"/>
           </a:p>
@@ -10370,7 +10637,7 @@
                 <a:ea typeface="Times New Roman" pitchFamily="34" charset="-122"/>
                 <a:cs typeface="Times New Roman" pitchFamily="34" charset="-120"/>
               </a:rPr>
-              <a:t>The three layers of crops in an oasis.</a:t>
+              <a:t>Layers of crops in an oasis.</a:t>
             </a:r>
             <a:endParaRPr lang="en-US" sz="1800" dirty="0"/>
           </a:p>
@@ -10482,7 +10749,7 @@
                 <a:ea typeface="Calibri" pitchFamily="34" charset="-122"/>
                 <a:cs typeface="Calibri" pitchFamily="34" charset="-120"/>
               </a:rPr>
-              <a:t>2. FARMING AROUND OASES</a:t>
+              <a:t>2. OASIS FARMING</a:t>
             </a:r>
             <a:endParaRPr lang="en-US" sz="1400" dirty="0"/>
           </a:p>
@@ -10589,7 +10856,7 @@
                 <a:ea typeface="Times New Roman" pitchFamily="34" charset="-122"/>
                 <a:cs typeface="Times New Roman" pitchFamily="34" charset="-120"/>
               </a:rPr>
-              <a:t>Name the three layers of crops. Why do farmers grow crops under the palms?</a:t>
+              <a:t>Why do farmers grow crops under the palms?</a:t>
             </a:r>
             <a:endParaRPr lang="en-US" sz="4000" dirty="0"/>
           </a:p>
@@ -10701,7 +10968,7 @@
                 <a:ea typeface="Calibri" pitchFamily="34" charset="-122"/>
                 <a:cs typeface="Calibri" pitchFamily="34" charset="-120"/>
               </a:rPr>
-              <a:t>2. FARMING AROUND OASES</a:t>
+              <a:t>2. OASIS FARMING</a:t>
             </a:r>
             <a:endParaRPr lang="en-US" sz="1400" dirty="0"/>
           </a:p>
@@ -10808,7 +11075,7 @@
                 <a:ea typeface="Times New Roman" pitchFamily="34" charset="-122"/>
                 <a:cs typeface="Times New Roman" pitchFamily="34" charset="-120"/>
               </a:rPr>
-              <a:t>Date palms, fruit trees, vegetables. The palms give shade and keep the soil wet.</a:t>
+              <a:t>The palms give shade and keep the soil wet.</a:t>
             </a:r>
             <a:endParaRPr lang="en-US" sz="4000" dirty="0"/>
           </a:p>
@@ -10920,7 +11187,7 @@
                 <a:ea typeface="Calibri" pitchFamily="34" charset="-122"/>
                 <a:cs typeface="Calibri" pitchFamily="34" charset="-120"/>
               </a:rPr>
-              <a:t>2. FARMING AROUND OASES</a:t>
+              <a:t>3. IRRIGATION</a:t>
             </a:r>
             <a:endParaRPr lang="en-US" sz="1400" dirty="0"/>
           </a:p>
@@ -11022,7 +11289,7 @@
                 <a:ea typeface="Times New Roman" pitchFamily="34" charset="-122"/>
                 <a:cs typeface="Times New Roman" pitchFamily="34" charset="-120"/>
               </a:rPr>
-              <a:t>A shaduf in Egypt.</a:t>
+              <a:t>Lifting water.</a:t>
             </a:r>
             <a:endParaRPr lang="en-US" sz="1800" dirty="0"/>
           </a:p>
@@ -11134,7 +11401,7 @@
                 <a:ea typeface="Calibri" pitchFamily="34" charset="-122"/>
                 <a:cs typeface="Calibri" pitchFamily="34" charset="-120"/>
               </a:rPr>
-              <a:t>2. FARMING AROUND OASES</a:t>
+              <a:t>3. IRRIGATION</a:t>
             </a:r>
             <a:endParaRPr lang="en-US" sz="1400" dirty="0"/>
           </a:p>
@@ -11241,7 +11508,7 @@
                 <a:ea typeface="Times New Roman" pitchFamily="34" charset="-122"/>
                 <a:cs typeface="Times New Roman" pitchFamily="34" charset="-120"/>
               </a:rPr>
-              <a:t>What does this farmer use to lift water from the river?</a:t>
+              <a:t>What does this farmer use to lift water?</a:t>
             </a:r>
             <a:endParaRPr lang="en-US" sz="4000" dirty="0"/>
           </a:p>
@@ -12362,7 +12629,7 @@
                 <a:ea typeface="Calibri" pitchFamily="34" charset="-122"/>
                 <a:cs typeface="Calibri" pitchFamily="34" charset="-120"/>
               </a:rPr>
-              <a:t>2. FARMING AROUND OASES</a:t>
+              <a:t>3. IRRIGATION</a:t>
             </a:r>
             <a:endParaRPr lang="en-US" sz="1400" dirty="0"/>
           </a:p>
@@ -12469,7 +12736,7 @@
                 <a:ea typeface="Times New Roman" pitchFamily="34" charset="-122"/>
                 <a:cs typeface="Times New Roman" pitchFamily="34" charset="-120"/>
               </a:rPr>
-              <a:t>A shaduf: a long pole with a bucket.</a:t>
+              <a:t>A shaduf.</a:t>
             </a:r>
             <a:endParaRPr lang="en-US" sz="4000" dirty="0"/>
           </a:p>
@@ -12581,7 +12848,7 @@
                 <a:ea typeface="Calibri" pitchFamily="34" charset="-122"/>
                 <a:cs typeface="Calibri" pitchFamily="34" charset="-120"/>
               </a:rPr>
-              <a:t>2. FARMING AROUND OASES</a:t>
+              <a:t>3. IRRIGATION</a:t>
             </a:r>
             <a:endParaRPr lang="en-US" sz="1400" dirty="0"/>
           </a:p>
@@ -12683,7 +12950,7 @@
                 <a:ea typeface="Times New Roman" pitchFamily="34" charset="-122"/>
                 <a:cs typeface="Times New Roman" pitchFamily="34" charset="-120"/>
               </a:rPr>
-              <a:t>Round fields watered by machines, seen from the sky.</a:t>
+              <a:t>Modern irrigation.</a:t>
             </a:r>
             <a:endParaRPr lang="en-US" sz="1800" dirty="0"/>
           </a:p>
@@ -12795,7 +13062,7 @@
                 <a:ea typeface="Calibri" pitchFamily="34" charset="-122"/>
                 <a:cs typeface="Calibri" pitchFamily="34" charset="-120"/>
               </a:rPr>
-              <a:t>2. FARMING AROUND OASES</a:t>
+              <a:t>3. IRRIGATION</a:t>
             </a:r>
             <a:endParaRPr lang="en-US" sz="1400" dirty="0"/>
           </a:p>
@@ -12902,7 +13169,7 @@
                 <a:ea typeface="Times New Roman" pitchFamily="34" charset="-122"/>
                 <a:cs typeface="Times New Roman" pitchFamily="34" charset="-120"/>
               </a:rPr>
-              <a:t>How do modern farmers get water in the desert?</a:t>
+              <a:t>Where do modern farmers get water in the desert?</a:t>
             </a:r>
             <a:endParaRPr lang="en-US" sz="4000" dirty="0"/>
           </a:p>
@@ -13014,7 +13281,7 @@
                 <a:ea typeface="Calibri" pitchFamily="34" charset="-122"/>
                 <a:cs typeface="Calibri" pitchFamily="34" charset="-120"/>
               </a:rPr>
-              <a:t>2. FARMING AROUND OASES</a:t>
+              <a:t>3. IRRIGATION</a:t>
             </a:r>
             <a:endParaRPr lang="en-US" sz="1400" dirty="0"/>
           </a:p>
@@ -13121,7 +13388,7 @@
                 <a:ea typeface="Times New Roman" pitchFamily="34" charset="-122"/>
                 <a:cs typeface="Times New Roman" pitchFamily="34" charset="-120"/>
               </a:rPr>
-              <a:t>They pump water from deep wells (boreholes).</a:t>
+              <a:t>From deep wells (boreholes).</a:t>
             </a:r>
             <a:endParaRPr lang="en-US" sz="4000" dirty="0"/>
           </a:p>
@@ -13332,7 +13599,7 @@
               <a:buNone/>
             </a:pPr>
             <a:r>
-              <a:rPr lang="en-US" sz="4000" b="1" dirty="0">
+              <a:rPr lang="en-US" sz="3200" b="1" dirty="0">
                 <a:solidFill>
                   <a:srgbClr val="111111"/>
                 </a:solidFill>
@@ -13342,7 +13609,7 @@
               </a:rPr>
               <a:t>Topic: Man in His Environment</a:t>
             </a:r>
-            <a:endParaRPr lang="en-US" sz="4000" dirty="0"/>
+            <a:endParaRPr lang="en-US" sz="3200" dirty="0"/>
           </a:p>
           <a:p>
             <a:pPr algn="l" indent="0" marL="0">
@@ -13352,7 +13619,7 @@
               <a:buNone/>
             </a:pPr>
             <a:r>
-              <a:rPr lang="en-US" sz="4000" b="1" dirty="0">
+              <a:rPr lang="en-US" sz="3200" b="1" dirty="0">
                 <a:solidFill>
                   <a:srgbClr val="111111"/>
                 </a:solidFill>
@@ -13362,7 +13629,7 @@
               </a:rPr>
               <a:t>Sub-topic: Natural Regions</a:t>
             </a:r>
-            <a:endParaRPr lang="en-US" sz="4000" dirty="0"/>
+            <a:endParaRPr lang="en-US" sz="3200" dirty="0"/>
           </a:p>
           <a:p>
             <a:pPr algn="l" indent="0" marL="0">
@@ -13372,7 +13639,7 @@
               <a:buNone/>
             </a:pPr>
             <a:r>
-              <a:rPr lang="en-US" sz="4000" b="1" dirty="0">
+              <a:rPr lang="en-US" sz="3200" b="1" dirty="0">
                 <a:solidFill>
                   <a:srgbClr val="990011"/>
                 </a:solidFill>
@@ -13382,7 +13649,7 @@
               </a:rPr>
               <a:t>Lesson 3 (Part 5): The Desert Regions: Human Activities (Farming around Oases)</a:t>
             </a:r>
-            <a:endParaRPr lang="en-US" sz="4000" dirty="0"/>
+            <a:endParaRPr lang="en-US" sz="3200" dirty="0"/>
           </a:p>
         </p:txBody>
       </p:sp>
@@ -13515,7 +13782,7 @@
         <p:spPr>
           <a:xfrm>
             <a:off x="0" y="658368"/>
-            <a:ext cx="3840480" cy="5833872"/>
+            <a:ext cx="5120640" cy="5833872"/>
           </a:xfrm>
           <a:prstGeom prst="rect">
             <a:avLst/>
@@ -13530,8 +13797,8 @@
         </p:nvSpPr>
         <p:spPr>
           <a:xfrm>
-            <a:off x="4069080" y="1005840"/>
-            <a:ext cx="7802575" cy="731520"/>
+            <a:off x="5349240" y="1005840"/>
+            <a:ext cx="6522415" cy="731520"/>
           </a:xfrm>
           <a:prstGeom prst="rect">
             <a:avLst/>
@@ -13557,7 +13824,7 @@
                 <a:ea typeface="Times New Roman" pitchFamily="34" charset="-122"/>
                 <a:cs typeface="Times New Roman" pitchFamily="34" charset="-120"/>
               </a:rPr>
-              <a:t>1. The Oasis</a:t>
+              <a:t>DEFINITIONS</a:t>
             </a:r>
             <a:endParaRPr lang="en-US" sz="3600" dirty="0"/>
           </a:p>
@@ -13571,8 +13838,8 @@
         </p:nvSpPr>
         <p:spPr>
           <a:xfrm>
-            <a:off x="4069080" y="1783080"/>
-            <a:ext cx="7802575" cy="4663440"/>
+            <a:off x="5349240" y="1783080"/>
+            <a:ext cx="6522415" cy="4663440"/>
           </a:xfrm>
           <a:prstGeom prst="rect">
             <a:avLst/>
@@ -13599,16 +13866,17 @@
                 <a:ea typeface="Times New Roman" pitchFamily="34" charset="-122"/>
                 <a:cs typeface="Times New Roman" pitchFamily="34" charset="-120"/>
               </a:rPr>
-              <a:t>The oasis is explained as follows:</a:t>
+              <a:t>The key terms of this lesson are defined as follows:</a:t>
             </a:r>
             <a:endParaRPr lang="en-US" sz="4000" dirty="0"/>
           </a:p>
           <a:p>
-            <a:pPr algn="l" indent="0" marL="0">
+            <a:pPr algn="l" marL="342900" indent="-342900">
               <a:spcAft>
                 <a:spcPts val="800"/>
               </a:spcAft>
-              <a:buNone/>
+              <a:buSzPct val="100000"/>
+              <a:buChar char="•"/>
             </a:pPr>
             <a:r>
               <a:rPr lang="en-US" sz="4000" b="1" dirty="0">
@@ -13621,11 +13889,12 @@
               </a:rPr>
               <a:t>Oasis: </a:t>
             </a:r>
-            <a:pPr algn="l" indent="0" marL="0">
+            <a:pPr algn="l" marL="342900" indent="-342900">
               <a:spcAft>
                 <a:spcPts val="800"/>
               </a:spcAft>
-              <a:buNone/>
+              <a:buSzPct val="100000"/>
+              <a:buChar char="•"/>
             </a:pPr>
             <a:r>
               <a:rPr lang="en-US" sz="4000" dirty="0">
@@ -13636,16 +13905,17 @@
                 <a:ea typeface="Times New Roman" pitchFamily="34" charset="-122"/>
                 <a:cs typeface="Times New Roman" pitchFamily="34" charset="-120"/>
               </a:rPr>
-              <a:t>It is a green place in the desert where there is water.</a:t>
+              <a:t>It is a green, fertile place in a desert where water is found.</a:t>
             </a:r>
             <a:endParaRPr lang="en-US" sz="4000" dirty="0"/>
           </a:p>
           <a:p>
-            <a:pPr algn="l" indent="0" marL="0">
+            <a:pPr algn="l" marL="342900" indent="-342900">
               <a:spcAft>
                 <a:spcPts val="800"/>
               </a:spcAft>
-              <a:buNone/>
+              <a:buSzPct val="100000"/>
+              <a:buChar char="•"/>
             </a:pPr>
             <a:r>
               <a:rPr lang="en-US" sz="4000" b="1" dirty="0">
@@ -13656,13 +13926,14 @@
                 <a:ea typeface="Times New Roman" pitchFamily="34" charset="-122"/>
                 <a:cs typeface="Times New Roman" pitchFamily="34" charset="-120"/>
               </a:rPr>
-              <a:t>Formation: </a:t>
-            </a:r>
-            <a:pPr algn="l" indent="0" marL="0">
+              <a:t>Irrigation: </a:t>
+            </a:r>
+            <a:pPr algn="l" marL="342900" indent="-342900">
               <a:spcAft>
                 <a:spcPts val="800"/>
               </a:spcAft>
-              <a:buNone/>
+              <a:buSzPct val="100000"/>
+              <a:buChar char="•"/>
             </a:pPr>
             <a:r>
               <a:rPr lang="en-US" sz="4000" dirty="0">
@@ -13673,7 +13944,7 @@
                 <a:ea typeface="Times New Roman" pitchFamily="34" charset="-122"/>
                 <a:cs typeface="Times New Roman" pitchFamily="34" charset="-120"/>
               </a:rPr>
-              <a:t>Rainwater from far hills flows under the ground and comes up in a low place in the desert.</a:t>
+              <a:t>It is bringing water to crops.</a:t>
             </a:r>
             <a:endParaRPr lang="en-US" sz="4000" dirty="0"/>
           </a:p>
@@ -13791,9 +14062,131 @@
           </a:p>
         </p:txBody>
       </p:sp>
+      <p:sp>
+        <p:nvSpPr>
+          <p:cNvPr id="3" name="Text 1"/>
+          <p:cNvSpPr/>
+          <p:nvPr/>
+        </p:nvSpPr>
+        <p:spPr>
+          <a:xfrm>
+            <a:off x="365760" y="1005840"/>
+            <a:ext cx="11460175" cy="731520"/>
+          </a:xfrm>
+          <a:prstGeom prst="rect">
+            <a:avLst/>
+          </a:prstGeom>
+          <a:noFill/>
+          <a:ln/>
+        </p:spPr>
+        <p:txBody>
+          <a:bodyPr wrap="square" lIns="0" tIns="0" rIns="0" bIns="0" rtlCol="0" anchor="ctr">
+            <a:normAutofit/>
+          </a:bodyPr>
+          <a:lstStyle/>
+          <a:p>
+            <a:pPr algn="ctr" indent="0" marL="0">
+              <a:buNone/>
+            </a:pPr>
+            <a:r>
+              <a:rPr lang="en-US" sz="3600" b="1" dirty="0">
+                <a:solidFill>
+                  <a:srgbClr val="990011"/>
+                </a:solidFill>
+                <a:latin typeface="Times New Roman" pitchFamily="34" charset="0"/>
+                <a:ea typeface="Times New Roman" pitchFamily="34" charset="-122"/>
+                <a:cs typeface="Times New Roman" pitchFamily="34" charset="-120"/>
+              </a:rPr>
+              <a:t>1. Formation of Oases</a:t>
+            </a:r>
+            <a:endParaRPr lang="en-US" sz="3600" dirty="0"/>
+          </a:p>
+        </p:txBody>
+      </p:sp>
+      <p:sp>
+        <p:nvSpPr>
+          <p:cNvPr id="4" name="Text 2"/>
+          <p:cNvSpPr/>
+          <p:nvPr/>
+        </p:nvSpPr>
+        <p:spPr>
+          <a:xfrm>
+            <a:off x="365760" y="1783080"/>
+            <a:ext cx="4846320" cy="4617720"/>
+          </a:xfrm>
+          <a:prstGeom prst="rect">
+            <a:avLst/>
+          </a:prstGeom>
+          <a:noFill/>
+          <a:ln/>
+        </p:spPr>
+        <p:txBody>
+          <a:bodyPr wrap="square" lIns="0" tIns="0" rIns="0" bIns="0" rtlCol="0" anchor="t"/>
+          <a:lstStyle/>
+          <a:p>
+            <a:pPr algn="l" indent="0" marL="0">
+              <a:spcAft>
+                <a:spcPts val="800"/>
+              </a:spcAft>
+              <a:buNone/>
+            </a:pPr>
+            <a:r>
+              <a:rPr lang="en-US" sz="3600" i="1" dirty="0">
+                <a:solidFill>
+                  <a:srgbClr val="111111"/>
+                </a:solidFill>
+                <a:latin typeface="Times New Roman" pitchFamily="34" charset="0"/>
+                <a:ea typeface="Times New Roman" pitchFamily="34" charset="-122"/>
+                <a:cs typeface="Times New Roman" pitchFamily="34" charset="-120"/>
+              </a:rPr>
+              <a:t>Oases are formed as follows:</a:t>
+            </a:r>
+            <a:endParaRPr lang="en-US" sz="3600" dirty="0"/>
+          </a:p>
+          <a:p>
+            <a:pPr algn="l" marL="342900" indent="-342900">
+              <a:spcAft>
+                <a:spcPts val="800"/>
+              </a:spcAft>
+              <a:buSzPct val="100000"/>
+              <a:buChar char="•"/>
+            </a:pPr>
+            <a:r>
+              <a:rPr lang="en-US" sz="3600" b="1" dirty="0">
+                <a:solidFill>
+                  <a:srgbClr val="111111"/>
+                </a:solidFill>
+                <a:latin typeface="Times New Roman" pitchFamily="34" charset="0"/>
+                <a:ea typeface="Times New Roman" pitchFamily="34" charset="-122"/>
+                <a:cs typeface="Times New Roman" pitchFamily="34" charset="-120"/>
+              </a:rPr>
+              <a:t>Rain on far hills: </a:t>
+            </a:r>
+            <a:pPr algn="l" marL="342900" indent="-342900">
+              <a:spcAft>
+                <a:spcPts val="800"/>
+              </a:spcAft>
+              <a:buSzPct val="100000"/>
+              <a:buChar char="•"/>
+            </a:pPr>
+            <a:r>
+              <a:rPr lang="en-US" sz="3600" dirty="0">
+                <a:solidFill>
+                  <a:srgbClr val="111111"/>
+                </a:solidFill>
+                <a:latin typeface="Times New Roman" pitchFamily="34" charset="0"/>
+                <a:ea typeface="Times New Roman" pitchFamily="34" charset="-122"/>
+                <a:cs typeface="Times New Roman" pitchFamily="34" charset="-120"/>
+              </a:rPr>
+              <a:t>Rain sinks into the rocks.</a:t>
+            </a:r>
+            <a:endParaRPr lang="en-US" sz="3600" dirty="0"/>
+          </a:p>
+        </p:txBody>
+      </p:sp>
       <p:pic>
         <p:nvPicPr>
-          <p:cNvPr id="3" name="Image 0" descr="/home/claude/f4/img/minesec_sheet.png">    </p:cNvPr>
+          <p:cNvPr id="5" name="Image 0" descr="/home/claude/f4/img/v2/oasis_big.png">    </p:cNvPr>
           <p:cNvPicPr>
             <a:picLocks noChangeAspect="1"/>
           </p:cNvPicPr>
@@ -13807,8 +14200,8 @@
         </p:blipFill>
         <p:spPr>
           <a:xfrm>
-            <a:off x="0" y="658368"/>
-            <a:ext cx="5120640" cy="5833872"/>
+            <a:off x="5349240" y="2617506"/>
+            <a:ext cx="6659575" cy="2601397"/>
           </a:xfrm>
           <a:prstGeom prst="rect">
             <a:avLst/>
@@ -13817,14 +14210,14 @@
       </p:pic>
       <p:sp>
         <p:nvSpPr>
-          <p:cNvPr id="4" name="Text 1"/>
+          <p:cNvPr id="6" name="Text 3"/>
           <p:cNvSpPr/>
           <p:nvPr/>
         </p:nvSpPr>
         <p:spPr>
           <a:xfrm>
-            <a:off x="5349240" y="1005840"/>
-            <a:ext cx="6522415" cy="731520"/>
+            <a:off x="5349240" y="6089904"/>
+            <a:ext cx="6659575" cy="347472"/>
           </a:xfrm>
           <a:prstGeom prst="rect">
             <a:avLst/>
@@ -13833,85 +14226,24 @@
           <a:ln/>
         </p:spPr>
         <p:txBody>
-          <a:bodyPr wrap="square" lIns="0" tIns="0" rIns="0" bIns="0" rtlCol="0" anchor="ctr">
-            <a:normAutofit/>
-          </a:bodyPr>
+          <a:bodyPr wrap="square" lIns="0" tIns="0" rIns="0" bIns="0" rtlCol="0" anchor="ctr"/>
           <a:lstStyle/>
           <a:p>
             <a:pPr algn="ctr" indent="0" marL="0">
               <a:buNone/>
             </a:pPr>
             <a:r>
-              <a:rPr lang="en-US" sz="3600" b="1" dirty="0">
-                <a:solidFill>
-                  <a:srgbClr val="990011"/>
+              <a:rPr lang="en-US" sz="1600" i="1" dirty="0">
+                <a:solidFill>
+                  <a:srgbClr val="555555"/>
                 </a:solidFill>
                 <a:latin typeface="Times New Roman" pitchFamily="34" charset="0"/>
                 <a:ea typeface="Times New Roman" pitchFamily="34" charset="-122"/>
                 <a:cs typeface="Times New Roman" pitchFamily="34" charset="-120"/>
               </a:rPr>
-              <a:t>1. The Oasis (continued)</a:t>
-            </a:r>
-            <a:endParaRPr lang="en-US" sz="3600" dirty="0"/>
-          </a:p>
-        </p:txBody>
-      </p:sp>
-      <p:sp>
-        <p:nvSpPr>
-          <p:cNvPr id="5" name="Text 2"/>
-          <p:cNvSpPr/>
-          <p:nvPr/>
-        </p:nvSpPr>
-        <p:spPr>
-          <a:xfrm>
-            <a:off x="5349240" y="1783080"/>
-            <a:ext cx="6522415" cy="4663440"/>
-          </a:xfrm>
-          <a:prstGeom prst="rect">
-            <a:avLst/>
-          </a:prstGeom>
-          <a:noFill/>
-          <a:ln/>
-        </p:spPr>
-        <p:txBody>
-          <a:bodyPr wrap="square" lIns="0" tIns="0" rIns="0" bIns="0" rtlCol="0" anchor="t"/>
-          <a:lstStyle/>
-          <a:p>
-            <a:pPr algn="l" indent="0" marL="0">
-              <a:spcAft>
-                <a:spcPts val="800"/>
-              </a:spcAft>
-              <a:buNone/>
-            </a:pPr>
-            <a:r>
-              <a:rPr lang="en-US" sz="4000" b="1" dirty="0">
-                <a:solidFill>
-                  <a:srgbClr val="111111"/>
-                </a:solidFill>
-                <a:latin typeface="Times New Roman" pitchFamily="34" charset="0"/>
-                <a:ea typeface="Times New Roman" pitchFamily="34" charset="-122"/>
-                <a:cs typeface="Times New Roman" pitchFamily="34" charset="-120"/>
-              </a:rPr>
-              <a:t>Examples: </a:t>
-            </a:r>
-            <a:pPr algn="l" indent="0" marL="0">
-              <a:spcAft>
-                <a:spcPts val="800"/>
-              </a:spcAft>
-              <a:buNone/>
-            </a:pPr>
-            <a:r>
-              <a:rPr lang="en-US" sz="4000" dirty="0">
-                <a:solidFill>
-                  <a:srgbClr val="111111"/>
-                </a:solidFill>
-                <a:latin typeface="Times New Roman" pitchFamily="34" charset="0"/>
-                <a:ea typeface="Times New Roman" pitchFamily="34" charset="-122"/>
-                <a:cs typeface="Times New Roman" pitchFamily="34" charset="-120"/>
-              </a:rPr>
-              <a:t>Siwa in Egypt and Tafilalt in Morocco are famous oases.</a:t>
-            </a:r>
-            <a:endParaRPr lang="en-US" sz="4000" dirty="0"/>
+              <a:t>Illustration: how an oasis forms</a:t>
+            </a:r>
+            <a:endParaRPr lang="en-US" sz="1600" dirty="0"/>
           </a:p>
         </p:txBody>
       </p:sp>
@@ -14027,48 +14359,9 @@
           </a:p>
         </p:txBody>
       </p:sp>
-      <p:sp>
-        <p:nvSpPr>
-          <p:cNvPr id="3" name="Text 1"/>
-          <p:cNvSpPr/>
-          <p:nvPr/>
-        </p:nvSpPr>
-        <p:spPr>
-          <a:xfrm>
-            <a:off x="457200" y="1005840"/>
-            <a:ext cx="11277295" cy="731520"/>
-          </a:xfrm>
-          <a:prstGeom prst="rect">
-            <a:avLst/>
-          </a:prstGeom>
-          <a:noFill/>
-          <a:ln/>
-        </p:spPr>
-        <p:txBody>
-          <a:bodyPr wrap="square" lIns="0" tIns="0" rIns="0" bIns="0" rtlCol="0" anchor="ctr"/>
-          <a:lstStyle/>
-          <a:p>
-            <a:pPr algn="ctr" indent="0" marL="0">
-              <a:buNone/>
-            </a:pPr>
-            <a:r>
-              <a:rPr lang="en-US" sz="3600" b="1" dirty="0">
-                <a:solidFill>
-                  <a:srgbClr val="990011"/>
-                </a:solidFill>
-                <a:latin typeface="Times New Roman" pitchFamily="34" charset="0"/>
-                <a:ea typeface="Times New Roman" pitchFamily="34" charset="-122"/>
-                <a:cs typeface="Times New Roman" pitchFamily="34" charset="-120"/>
-              </a:rPr>
-              <a:t>1. The Oasis</a:t>
-            </a:r>
-            <a:endParaRPr lang="en-US" sz="3600" dirty="0"/>
-          </a:p>
-        </p:txBody>
-      </p:sp>
       <p:pic>
         <p:nvPicPr>
-          <p:cNvPr id="4" name="Image 0" descr="/home/claude/f4/img/v2/oasis_big.png">    </p:cNvPr>
+          <p:cNvPr id="3" name="Image 0" descr="/home/claude/f4/img/minesec_sheet.png">    </p:cNvPr>
           <p:cNvPicPr>
             <a:picLocks noChangeAspect="1"/>
           </p:cNvPicPr>
@@ -14082,8 +14375,8 @@
         </p:blipFill>
         <p:spPr>
           <a:xfrm>
-            <a:off x="629930" y="1783080"/>
-            <a:ext cx="10931835" cy="4270248"/>
+            <a:off x="0" y="658368"/>
+            <a:ext cx="5120640" cy="5833872"/>
           </a:xfrm>
           <a:prstGeom prst="rect">
             <a:avLst/>
@@ -14092,14 +14385,14 @@
       </p:pic>
       <p:sp>
         <p:nvSpPr>
-          <p:cNvPr id="5" name="Text 2"/>
+          <p:cNvPr id="4" name="Text 1"/>
           <p:cNvSpPr/>
           <p:nvPr/>
         </p:nvSpPr>
         <p:spPr>
           <a:xfrm>
-            <a:off x="457200" y="6089904"/>
-            <a:ext cx="11277295" cy="347472"/>
+            <a:off x="5349240" y="1005840"/>
+            <a:ext cx="6522415" cy="731520"/>
           </a:xfrm>
           <a:prstGeom prst="rect">
             <a:avLst/>
@@ -14108,24 +14401,126 @@
           <a:ln/>
         </p:spPr>
         <p:txBody>
-          <a:bodyPr wrap="square" lIns="0" tIns="0" rIns="0" bIns="0" rtlCol="0" anchor="ctr"/>
+          <a:bodyPr wrap="square" lIns="0" tIns="0" rIns="0" bIns="0" rtlCol="0" anchor="ctr">
+            <a:normAutofit/>
+          </a:bodyPr>
           <a:lstStyle/>
           <a:p>
             <a:pPr algn="ctr" indent="0" marL="0">
               <a:buNone/>
             </a:pPr>
             <a:r>
-              <a:rPr lang="en-US" sz="1800" i="1" dirty="0">
-                <a:solidFill>
-                  <a:srgbClr val="555555"/>
+              <a:rPr lang="en-US" sz="3600" b="1" dirty="0">
+                <a:solidFill>
+                  <a:srgbClr val="990011"/>
                 </a:solidFill>
                 <a:latin typeface="Times New Roman" pitchFamily="34" charset="0"/>
                 <a:ea typeface="Times New Roman" pitchFamily="34" charset="-122"/>
                 <a:cs typeface="Times New Roman" pitchFamily="34" charset="-120"/>
               </a:rPr>
-              <a:t>Illustration: formation of an oasis</a:t>
-            </a:r>
-            <a:endParaRPr lang="en-US" sz="1800" dirty="0"/>
+              <a:t>1. Formation of Oases</a:t>
+            </a:r>
+            <a:endParaRPr lang="en-US" sz="3600" dirty="0"/>
+          </a:p>
+        </p:txBody>
+      </p:sp>
+      <p:sp>
+        <p:nvSpPr>
+          <p:cNvPr id="5" name="Text 2"/>
+          <p:cNvSpPr/>
+          <p:nvPr/>
+        </p:nvSpPr>
+        <p:spPr>
+          <a:xfrm>
+            <a:off x="5349240" y="1783080"/>
+            <a:ext cx="6522415" cy="4663440"/>
+          </a:xfrm>
+          <a:prstGeom prst="rect">
+            <a:avLst/>
+          </a:prstGeom>
+          <a:noFill/>
+          <a:ln/>
+        </p:spPr>
+        <p:txBody>
+          <a:bodyPr wrap="square" lIns="0" tIns="0" rIns="0" bIns="0" rtlCol="0" anchor="t"/>
+          <a:lstStyle/>
+          <a:p>
+            <a:pPr algn="l" marL="342900" indent="-342900">
+              <a:spcAft>
+                <a:spcPts val="800"/>
+              </a:spcAft>
+              <a:buSzPct val="100000"/>
+              <a:buChar char="•"/>
+            </a:pPr>
+            <a:r>
+              <a:rPr lang="en-US" sz="4000" b="1" dirty="0">
+                <a:solidFill>
+                  <a:srgbClr val="111111"/>
+                </a:solidFill>
+                <a:latin typeface="Times New Roman" pitchFamily="34" charset="0"/>
+                <a:ea typeface="Times New Roman" pitchFamily="34" charset="-122"/>
+                <a:cs typeface="Times New Roman" pitchFamily="34" charset="-120"/>
+              </a:rPr>
+              <a:t>Underground water: </a:t>
+            </a:r>
+            <a:pPr algn="l" marL="342900" indent="-342900">
+              <a:spcAft>
+                <a:spcPts val="800"/>
+              </a:spcAft>
+              <a:buSzPct val="100000"/>
+              <a:buChar char="•"/>
+            </a:pPr>
+            <a:r>
+              <a:rPr lang="en-US" sz="4000" dirty="0">
+                <a:solidFill>
+                  <a:srgbClr val="111111"/>
+                </a:solidFill>
+                <a:latin typeface="Times New Roman" pitchFamily="34" charset="0"/>
+                <a:ea typeface="Times New Roman" pitchFamily="34" charset="-122"/>
+                <a:cs typeface="Times New Roman" pitchFamily="34" charset="-120"/>
+              </a:rPr>
+              <a:t>The water moves under the desert.</a:t>
+            </a:r>
+            <a:endParaRPr lang="en-US" sz="4000" dirty="0"/>
+          </a:p>
+          <a:p>
+            <a:pPr algn="l" marL="342900" indent="-342900">
+              <a:spcAft>
+                <a:spcPts val="800"/>
+              </a:spcAft>
+              <a:buSzPct val="100000"/>
+              <a:buChar char="•"/>
+            </a:pPr>
+            <a:r>
+              <a:rPr lang="en-US" sz="4000" b="1" dirty="0">
+                <a:solidFill>
+                  <a:srgbClr val="111111"/>
+                </a:solidFill>
+                <a:latin typeface="Times New Roman" pitchFamily="34" charset="0"/>
+                <a:ea typeface="Times New Roman" pitchFamily="34" charset="-122"/>
+                <a:cs typeface="Times New Roman" pitchFamily="34" charset="-120"/>
+              </a:rPr>
+              <a:t>Water at the surface: </a:t>
+            </a:r>
+            <a:pPr algn="l" marL="342900" indent="-342900">
+              <a:spcAft>
+                <a:spcPts val="800"/>
+              </a:spcAft>
+              <a:buSzPct val="100000"/>
+              <a:buChar char="•"/>
+            </a:pPr>
+            <a:r>
+              <a:rPr lang="en-US" sz="4000" dirty="0">
+                <a:solidFill>
+                  <a:srgbClr val="111111"/>
+                </a:solidFill>
+                <a:latin typeface="Times New Roman" pitchFamily="34" charset="0"/>
+                <a:ea typeface="Times New Roman" pitchFamily="34" charset="-122"/>
+                <a:cs typeface="Times New Roman" pitchFamily="34" charset="-120"/>
+              </a:rPr>
+              <a:t>It comes up in a low place and forms an oasis.</a:t>
+            </a:r>
+            <a:endParaRPr lang="en-US" sz="4000" dirty="0"/>
           </a:p>
         </p:txBody>
       </p:sp>
@@ -14241,9 +14636,131 @@
           </a:p>
         </p:txBody>
       </p:sp>
+      <p:sp>
+        <p:nvSpPr>
+          <p:cNvPr id="3" name="Text 1"/>
+          <p:cNvSpPr/>
+          <p:nvPr/>
+        </p:nvSpPr>
+        <p:spPr>
+          <a:xfrm>
+            <a:off x="365760" y="1005840"/>
+            <a:ext cx="11460175" cy="731520"/>
+          </a:xfrm>
+          <a:prstGeom prst="rect">
+            <a:avLst/>
+          </a:prstGeom>
+          <a:noFill/>
+          <a:ln/>
+        </p:spPr>
+        <p:txBody>
+          <a:bodyPr wrap="square" lIns="0" tIns="0" rIns="0" bIns="0" rtlCol="0" anchor="ctr">
+            <a:normAutofit/>
+          </a:bodyPr>
+          <a:lstStyle/>
+          <a:p>
+            <a:pPr algn="ctr" indent="0" marL="0">
+              <a:buNone/>
+            </a:pPr>
+            <a:r>
+              <a:rPr lang="en-US" sz="3600" b="1" dirty="0">
+                <a:solidFill>
+                  <a:srgbClr val="990011"/>
+                </a:solidFill>
+                <a:latin typeface="Times New Roman" pitchFamily="34" charset="0"/>
+                <a:ea typeface="Times New Roman" pitchFamily="34" charset="-122"/>
+                <a:cs typeface="Times New Roman" pitchFamily="34" charset="-120"/>
+              </a:rPr>
+              <a:t>2. Farming around Oases</a:t>
+            </a:r>
+            <a:endParaRPr lang="en-US" sz="3600" dirty="0"/>
+          </a:p>
+        </p:txBody>
+      </p:sp>
+      <p:sp>
+        <p:nvSpPr>
+          <p:cNvPr id="4" name="Text 2"/>
+          <p:cNvSpPr/>
+          <p:nvPr/>
+        </p:nvSpPr>
+        <p:spPr>
+          <a:xfrm>
+            <a:off x="365760" y="1783080"/>
+            <a:ext cx="4846320" cy="4617720"/>
+          </a:xfrm>
+          <a:prstGeom prst="rect">
+            <a:avLst/>
+          </a:prstGeom>
+          <a:noFill/>
+          <a:ln/>
+        </p:spPr>
+        <p:txBody>
+          <a:bodyPr wrap="square" lIns="0" tIns="0" rIns="0" bIns="0" rtlCol="0" anchor="t"/>
+          <a:lstStyle/>
+          <a:p>
+            <a:pPr algn="l" indent="0" marL="0">
+              <a:spcAft>
+                <a:spcPts val="800"/>
+              </a:spcAft>
+              <a:buNone/>
+            </a:pPr>
+            <a:r>
+              <a:rPr lang="en-US" sz="3600" i="1" dirty="0">
+                <a:solidFill>
+                  <a:srgbClr val="111111"/>
+                </a:solidFill>
+                <a:latin typeface="Times New Roman" pitchFamily="34" charset="0"/>
+                <a:ea typeface="Times New Roman" pitchFamily="34" charset="-122"/>
+                <a:cs typeface="Times New Roman" pitchFamily="34" charset="-120"/>
+              </a:rPr>
+              <a:t>Oasis farming has the following characteristics:</a:t>
+            </a:r>
+            <a:endParaRPr lang="en-US" sz="3600" dirty="0"/>
+          </a:p>
+          <a:p>
+            <a:pPr algn="l" marL="342900" indent="-342900">
+              <a:spcAft>
+                <a:spcPts val="800"/>
+              </a:spcAft>
+              <a:buSzPct val="100000"/>
+              <a:buChar char="•"/>
+            </a:pPr>
+            <a:r>
+              <a:rPr lang="en-US" sz="3600" b="1" dirty="0">
+                <a:solidFill>
+                  <a:srgbClr val="111111"/>
+                </a:solidFill>
+                <a:latin typeface="Times New Roman" pitchFamily="34" charset="0"/>
+                <a:ea typeface="Times New Roman" pitchFamily="34" charset="-122"/>
+                <a:cs typeface="Times New Roman" pitchFamily="34" charset="-120"/>
+              </a:rPr>
+              <a:t>Date palms: </a:t>
+            </a:r>
+            <a:pPr algn="l" marL="342900" indent="-342900">
+              <a:spcAft>
+                <a:spcPts val="800"/>
+              </a:spcAft>
+              <a:buSzPct val="100000"/>
+              <a:buChar char="•"/>
+            </a:pPr>
+            <a:r>
+              <a:rPr lang="en-US" sz="3600" dirty="0">
+                <a:solidFill>
+                  <a:srgbClr val="111111"/>
+                </a:solidFill>
+                <a:latin typeface="Times New Roman" pitchFamily="34" charset="0"/>
+                <a:ea typeface="Times New Roman" pitchFamily="34" charset="-122"/>
+                <a:cs typeface="Times New Roman" pitchFamily="34" charset="-120"/>
+              </a:rPr>
+              <a:t>The top layer gives dates and shade.</a:t>
+            </a:r>
+            <a:endParaRPr lang="en-US" sz="3600" dirty="0"/>
+          </a:p>
+        </p:txBody>
+      </p:sp>
       <p:pic>
         <p:nvPicPr>
-          <p:cNvPr id="3" name="Image 0" descr="/home/claude/f4/img/minesec_sheet.png">    </p:cNvPr>
+          <p:cNvPr id="5" name="Image 0" descr="/home/claude/f4/img/v2/oasis_layers_big.png">    </p:cNvPr>
           <p:cNvPicPr>
             <a:picLocks noChangeAspect="1"/>
           </p:cNvPicPr>
@@ -14257,8 +14774,8 @@
         </p:blipFill>
         <p:spPr>
           <a:xfrm>
-            <a:off x="0" y="658368"/>
-            <a:ext cx="1463040" cy="5833872"/>
+            <a:off x="5349240" y="2617506"/>
+            <a:ext cx="6659575" cy="2601397"/>
           </a:xfrm>
           <a:prstGeom prst="rect">
             <a:avLst/>
@@ -14267,14 +14784,14 @@
       </p:pic>
       <p:sp>
         <p:nvSpPr>
-          <p:cNvPr id="4" name="Text 1"/>
+          <p:cNvPr id="6" name="Text 3"/>
           <p:cNvSpPr/>
           <p:nvPr/>
         </p:nvSpPr>
         <p:spPr>
           <a:xfrm>
-            <a:off x="1691640" y="1005840"/>
-            <a:ext cx="10180015" cy="731520"/>
+            <a:off x="5349240" y="6089904"/>
+            <a:ext cx="6659575" cy="347472"/>
           </a:xfrm>
           <a:prstGeom prst="rect">
             <a:avLst/>
@@ -14283,142 +14800,24 @@
           <a:ln/>
         </p:spPr>
         <p:txBody>
-          <a:bodyPr wrap="square" lIns="0" tIns="0" rIns="0" bIns="0" rtlCol="0" anchor="ctr">
-            <a:normAutofit/>
-          </a:bodyPr>
+          <a:bodyPr wrap="square" lIns="0" tIns="0" rIns="0" bIns="0" rtlCol="0" anchor="ctr"/>
           <a:lstStyle/>
           <a:p>
             <a:pPr algn="ctr" indent="0" marL="0">
               <a:buNone/>
             </a:pPr>
             <a:r>
-              <a:rPr lang="en-US" sz="3600" b="1" dirty="0">
-                <a:solidFill>
-                  <a:srgbClr val="990011"/>
+              <a:rPr lang="en-US" sz="1600" i="1" dirty="0">
+                <a:solidFill>
+                  <a:srgbClr val="555555"/>
                 </a:solidFill>
                 <a:latin typeface="Times New Roman" pitchFamily="34" charset="0"/>
                 <a:ea typeface="Times New Roman" pitchFamily="34" charset="-122"/>
                 <a:cs typeface="Times New Roman" pitchFamily="34" charset="-120"/>
               </a:rPr>
-              <a:t>2. Farming around Oases</a:t>
-            </a:r>
-            <a:endParaRPr lang="en-US" sz="3600" dirty="0"/>
-          </a:p>
-        </p:txBody>
-      </p:sp>
-      <p:sp>
-        <p:nvSpPr>
-          <p:cNvPr id="5" name="Text 2"/>
-          <p:cNvSpPr/>
-          <p:nvPr/>
-        </p:nvSpPr>
-        <p:spPr>
-          <a:xfrm>
-            <a:off x="1691640" y="1783080"/>
-            <a:ext cx="10180015" cy="4663440"/>
-          </a:xfrm>
-          <a:prstGeom prst="rect">
-            <a:avLst/>
-          </a:prstGeom>
-          <a:noFill/>
-          <a:ln/>
-        </p:spPr>
-        <p:txBody>
-          <a:bodyPr wrap="square" lIns="0" tIns="0" rIns="0" bIns="0" rtlCol="0" anchor="t"/>
-          <a:lstStyle/>
-          <a:p>
-            <a:pPr algn="l" indent="0" marL="0">
-              <a:spcAft>
-                <a:spcPts val="800"/>
-              </a:spcAft>
-              <a:buNone/>
-            </a:pPr>
-            <a:r>
-              <a:rPr lang="en-US" sz="4000" i="1" dirty="0">
-                <a:solidFill>
-                  <a:srgbClr val="111111"/>
-                </a:solidFill>
-                <a:latin typeface="Times New Roman" pitchFamily="34" charset="0"/>
-                <a:ea typeface="Times New Roman" pitchFamily="34" charset="-122"/>
-                <a:cs typeface="Times New Roman" pitchFamily="34" charset="-120"/>
-              </a:rPr>
-              <a:t>Farming around oases is carried out as follows:</a:t>
-            </a:r>
-            <a:endParaRPr lang="en-US" sz="4000" dirty="0"/>
-          </a:p>
-          <a:p>
-            <a:pPr algn="l" indent="0" marL="0">
-              <a:spcAft>
-                <a:spcPts val="800"/>
-              </a:spcAft>
-              <a:buNone/>
-            </a:pPr>
-            <a:r>
-              <a:rPr lang="en-US" sz="4000" b="1" dirty="0">
-                <a:solidFill>
-                  <a:srgbClr val="111111"/>
-                </a:solidFill>
-                <a:latin typeface="Times New Roman" pitchFamily="34" charset="0"/>
-                <a:ea typeface="Times New Roman" pitchFamily="34" charset="-122"/>
-                <a:cs typeface="Times New Roman" pitchFamily="34" charset="-120"/>
-              </a:rPr>
-              <a:t>Three layers: </a:t>
-            </a:r>
-            <a:pPr algn="l" indent="0" marL="0">
-              <a:spcAft>
-                <a:spcPts val="800"/>
-              </a:spcAft>
-              <a:buNone/>
-            </a:pPr>
-            <a:r>
-              <a:rPr lang="en-US" sz="4000" dirty="0">
-                <a:solidFill>
-                  <a:srgbClr val="111111"/>
-                </a:solidFill>
-                <a:latin typeface="Times New Roman" pitchFamily="34" charset="0"/>
-                <a:ea typeface="Times New Roman" pitchFamily="34" charset="-122"/>
-                <a:cs typeface="Times New Roman" pitchFamily="34" charset="-120"/>
-              </a:rPr>
-              <a:t>Farmers grow date palms on top, fruit trees in the middle and vegetables below.</a:t>
-            </a:r>
-            <a:endParaRPr lang="en-US" sz="4000" dirty="0"/>
-          </a:p>
-          <a:p>
-            <a:pPr algn="l" indent="0" marL="0">
-              <a:spcAft>
-                <a:spcPts val="800"/>
-              </a:spcAft>
-              <a:buNone/>
-            </a:pPr>
-            <a:r>
-              <a:rPr lang="en-US" sz="4000" b="1" dirty="0">
-                <a:solidFill>
-                  <a:srgbClr val="111111"/>
-                </a:solidFill>
-                <a:latin typeface="Times New Roman" pitchFamily="34" charset="0"/>
-                <a:ea typeface="Times New Roman" pitchFamily="34" charset="-122"/>
-                <a:cs typeface="Times New Roman" pitchFamily="34" charset="-120"/>
-              </a:rPr>
-              <a:t>Irrigation methods: </a:t>
-            </a:r>
-            <a:pPr algn="l" indent="0" marL="0">
-              <a:spcAft>
-                <a:spcPts val="800"/>
-              </a:spcAft>
-              <a:buNone/>
-            </a:pPr>
-            <a:r>
-              <a:rPr lang="en-US" sz="4000" dirty="0">
-                <a:solidFill>
-                  <a:srgbClr val="111111"/>
-                </a:solidFill>
-                <a:latin typeface="Times New Roman" pitchFamily="34" charset="0"/>
-                <a:ea typeface="Times New Roman" pitchFamily="34" charset="-122"/>
-                <a:cs typeface="Times New Roman" pitchFamily="34" charset="-120"/>
-              </a:rPr>
-              <a:t>Water is lifted from wells with the shaduf, pumps and boreholes.</a:t>
-            </a:r>
-            <a:endParaRPr lang="en-US" sz="4000" dirty="0"/>
+              <a:t>Illustration: crops in an oasis</a:t>
+            </a:r>
+            <a:endParaRPr lang="en-US" sz="1600" dirty="0"/>
           </a:p>
         </p:txBody>
       </p:sp>
@@ -14551,7 +14950,7 @@
         <p:spPr>
           <a:xfrm>
             <a:off x="0" y="658368"/>
-            <a:ext cx="5120640" cy="5833872"/>
+            <a:ext cx="3840480" cy="5833872"/>
           </a:xfrm>
           <a:prstGeom prst="rect">
             <a:avLst/>
@@ -14566,8 +14965,8 @@
         </p:nvSpPr>
         <p:spPr>
           <a:xfrm>
-            <a:off x="5349240" y="1005840"/>
-            <a:ext cx="6522415" cy="731520"/>
+            <a:off x="4069080" y="1005840"/>
+            <a:ext cx="7802575" cy="731520"/>
           </a:xfrm>
           <a:prstGeom prst="rect">
             <a:avLst/>
@@ -14593,7 +14992,7 @@
                 <a:ea typeface="Times New Roman" pitchFamily="34" charset="-122"/>
                 <a:cs typeface="Times New Roman" pitchFamily="34" charset="-120"/>
               </a:rPr>
-              <a:t>2. Farming around Oases (continued)</a:t>
+              <a:t>2. Farming around Oases</a:t>
             </a:r>
             <a:endParaRPr lang="en-US" sz="3600" dirty="0"/>
           </a:p>
@@ -14607,8 +15006,8 @@
         </p:nvSpPr>
         <p:spPr>
           <a:xfrm>
-            <a:off x="5349240" y="1783080"/>
-            <a:ext cx="6522415" cy="4663440"/>
+            <a:off x="4069080" y="1783080"/>
+            <a:ext cx="7802575" cy="4663440"/>
           </a:xfrm>
           <a:prstGeom prst="rect">
             <a:avLst/>
@@ -14620,11 +15019,12 @@
           <a:bodyPr wrap="square" lIns="0" tIns="0" rIns="0" bIns="0" rtlCol="0" anchor="t"/>
           <a:lstStyle/>
           <a:p>
-            <a:pPr algn="l" indent="0" marL="0">
+            <a:pPr algn="l" marL="342900" indent="-342900">
               <a:spcAft>
                 <a:spcPts val="800"/>
               </a:spcAft>
-              <a:buNone/>
+              <a:buSzPct val="100000"/>
+              <a:buChar char="•"/>
             </a:pPr>
             <a:r>
               <a:rPr lang="en-US" sz="4000" b="1" dirty="0">
@@ -14635,13 +15035,14 @@
                 <a:ea typeface="Times New Roman" pitchFamily="34" charset="-122"/>
                 <a:cs typeface="Times New Roman" pitchFamily="34" charset="-120"/>
               </a:rPr>
-              <a:t>The Nile valley: </a:t>
-            </a:r>
-            <a:pPr algn="l" indent="0" marL="0">
+              <a:t>Fruit trees: </a:t>
+            </a:r>
+            <a:pPr algn="l" marL="342900" indent="-342900">
               <a:spcAft>
                 <a:spcPts val="800"/>
               </a:spcAft>
-              <a:buNone/>
+              <a:buSzPct val="100000"/>
+              <a:buChar char="•"/>
             </a:pPr>
             <a:r>
               <a:rPr lang="en-US" sz="4000" dirty="0">
@@ -14652,16 +15053,17 @@
                 <a:ea typeface="Times New Roman" pitchFamily="34" charset="-122"/>
                 <a:cs typeface="Times New Roman" pitchFamily="34" charset="-120"/>
               </a:rPr>
-              <a:t>The Aswan Dam gives water to farms along the Nile all year.</a:t>
+              <a:t>The middle layer gives oranges, figs and olives.</a:t>
             </a:r>
             <a:endParaRPr lang="en-US" sz="4000" dirty="0"/>
           </a:p>
           <a:p>
-            <a:pPr algn="l" indent="0" marL="0">
+            <a:pPr algn="l" marL="342900" indent="-342900">
               <a:spcAft>
                 <a:spcPts val="800"/>
               </a:spcAft>
-              <a:buNone/>
+              <a:buSzPct val="100000"/>
+              <a:buChar char="•"/>
             </a:pPr>
             <a:r>
               <a:rPr lang="en-US" sz="4000" b="1" dirty="0">
@@ -14672,13 +15074,14 @@
                 <a:ea typeface="Times New Roman" pitchFamily="34" charset="-122"/>
                 <a:cs typeface="Times New Roman" pitchFamily="34" charset="-120"/>
               </a:rPr>
-              <a:t>Problems: </a:t>
-            </a:r>
-            <a:pPr algn="l" indent="0" marL="0">
+              <a:t>Vegetables and cereals: </a:t>
+            </a:r>
+            <a:pPr algn="l" marL="342900" indent="-342900">
               <a:spcAft>
                 <a:spcPts val="800"/>
               </a:spcAft>
-              <a:buNone/>
+              <a:buSzPct val="100000"/>
+              <a:buChar char="•"/>
             </a:pPr>
             <a:r>
               <a:rPr lang="en-US" sz="4000" dirty="0">
@@ -14689,7 +15092,46 @@
                 <a:ea typeface="Times New Roman" pitchFamily="34" charset="-122"/>
                 <a:cs typeface="Times New Roman" pitchFamily="34" charset="-120"/>
               </a:rPr>
-              <a:t>Wells can dry up and moving sand can cover the fields.</a:t>
+              <a:t>The lower layer gives wheat, barley and vegetables.</a:t>
+            </a:r>
+            <a:endParaRPr lang="en-US" sz="4000" dirty="0"/>
+          </a:p>
+          <a:p>
+            <a:pPr algn="l" marL="342900" indent="-342900">
+              <a:spcAft>
+                <a:spcPts val="800"/>
+              </a:spcAft>
+              <a:buSzPct val="100000"/>
+              <a:buChar char="•"/>
+            </a:pPr>
+            <a:r>
+              <a:rPr lang="en-US" sz="4000" b="1" dirty="0">
+                <a:solidFill>
+                  <a:srgbClr val="111111"/>
+                </a:solidFill>
+                <a:latin typeface="Times New Roman" pitchFamily="34" charset="0"/>
+                <a:ea typeface="Times New Roman" pitchFamily="34" charset="-122"/>
+                <a:cs typeface="Times New Roman" pitchFamily="34" charset="-120"/>
+              </a:rPr>
+              <a:t>Animals: </a:t>
+            </a:r>
+            <a:pPr algn="l" marL="342900" indent="-342900">
+              <a:spcAft>
+                <a:spcPts val="800"/>
+              </a:spcAft>
+              <a:buSzPct val="100000"/>
+              <a:buChar char="•"/>
+            </a:pPr>
+            <a:r>
+              <a:rPr lang="en-US" sz="4000" dirty="0">
+                <a:solidFill>
+                  <a:srgbClr val="111111"/>
+                </a:solidFill>
+                <a:latin typeface="Times New Roman" pitchFamily="34" charset="0"/>
+                <a:ea typeface="Times New Roman" pitchFamily="34" charset="-122"/>
+                <a:cs typeface="Times New Roman" pitchFamily="34" charset="-120"/>
+              </a:rPr>
+              <a:t>Goats, camels and sheep.</a:t>
             </a:r>
             <a:endParaRPr lang="en-US" sz="4000" dirty="0"/>
           </a:p>
@@ -15040,15 +15482,137 @@
                 <a:ea typeface="Calibri" pitchFamily="34" charset="-122"/>
                 <a:cs typeface="Calibri" pitchFamily="34" charset="-120"/>
               </a:rPr>
-              <a:t>FORMATIVE EVALUATION</a:t>
+              <a:t>BOARD SUMMARY</a:t>
             </a:r>
             <a:endParaRPr lang="en-US" sz="1400" dirty="0"/>
+          </a:p>
+        </p:txBody>
+      </p:sp>
+      <p:sp>
+        <p:nvSpPr>
+          <p:cNvPr id="3" name="Text 1"/>
+          <p:cNvSpPr/>
+          <p:nvPr/>
+        </p:nvSpPr>
+        <p:spPr>
+          <a:xfrm>
+            <a:off x="365760" y="1005840"/>
+            <a:ext cx="11460175" cy="731520"/>
+          </a:xfrm>
+          <a:prstGeom prst="rect">
+            <a:avLst/>
+          </a:prstGeom>
+          <a:noFill/>
+          <a:ln/>
+        </p:spPr>
+        <p:txBody>
+          <a:bodyPr wrap="square" lIns="0" tIns="0" rIns="0" bIns="0" rtlCol="0" anchor="ctr">
+            <a:normAutofit/>
+          </a:bodyPr>
+          <a:lstStyle/>
+          <a:p>
+            <a:pPr algn="ctr" indent="0" marL="0">
+              <a:buNone/>
+            </a:pPr>
+            <a:r>
+              <a:rPr lang="en-US" sz="3600" b="1" dirty="0">
+                <a:solidFill>
+                  <a:srgbClr val="990011"/>
+                </a:solidFill>
+                <a:latin typeface="Times New Roman" pitchFamily="34" charset="0"/>
+                <a:ea typeface="Times New Roman" pitchFamily="34" charset="-122"/>
+                <a:cs typeface="Times New Roman" pitchFamily="34" charset="-120"/>
+              </a:rPr>
+              <a:t>3. Irrigation in Deserts</a:t>
+            </a:r>
+            <a:endParaRPr lang="en-US" sz="3600" dirty="0"/>
+          </a:p>
+        </p:txBody>
+      </p:sp>
+      <p:sp>
+        <p:nvSpPr>
+          <p:cNvPr id="4" name="Text 2"/>
+          <p:cNvSpPr/>
+          <p:nvPr/>
+        </p:nvSpPr>
+        <p:spPr>
+          <a:xfrm>
+            <a:off x="365760" y="1783080"/>
+            <a:ext cx="4846320" cy="4617720"/>
+          </a:xfrm>
+          <a:prstGeom prst="rect">
+            <a:avLst/>
+          </a:prstGeom>
+          <a:noFill/>
+          <a:ln/>
+        </p:spPr>
+        <p:txBody>
+          <a:bodyPr wrap="square" lIns="0" tIns="0" rIns="0" bIns="0" rtlCol="0" anchor="t"/>
+          <a:lstStyle/>
+          <a:p>
+            <a:pPr algn="l" indent="0" marL="0">
+              <a:spcAft>
+                <a:spcPts val="800"/>
+              </a:spcAft>
+              <a:buNone/>
+            </a:pPr>
+            <a:r>
+              <a:rPr lang="en-US" sz="3600" i="1" dirty="0">
+                <a:solidFill>
+                  <a:srgbClr val="111111"/>
+                </a:solidFill>
+                <a:latin typeface="Times New Roman" pitchFamily="34" charset="0"/>
+                <a:ea typeface="Times New Roman" pitchFamily="34" charset="-122"/>
+                <a:cs typeface="Times New Roman" pitchFamily="34" charset="-120"/>
+              </a:rPr>
+              <a:t>Water is brought to crops in the following ways:</a:t>
+            </a:r>
+            <a:endParaRPr lang="en-US" sz="3600" dirty="0"/>
+          </a:p>
+          <a:p>
+            <a:pPr algn="l" marL="342900" indent="-342900">
+              <a:spcAft>
+                <a:spcPts val="800"/>
+              </a:spcAft>
+              <a:buSzPct val="100000"/>
+              <a:buChar char="•"/>
+            </a:pPr>
+            <a:r>
+              <a:rPr lang="en-US" sz="3600" b="1" dirty="0">
+                <a:solidFill>
+                  <a:srgbClr val="111111"/>
+                </a:solidFill>
+                <a:latin typeface="Times New Roman" pitchFamily="34" charset="0"/>
+                <a:ea typeface="Times New Roman" pitchFamily="34" charset="-122"/>
+                <a:cs typeface="Times New Roman" pitchFamily="34" charset="-120"/>
+              </a:rPr>
+              <a:t>Shaduf: </a:t>
+            </a:r>
+            <a:pPr algn="l" marL="342900" indent="-342900">
+              <a:spcAft>
+                <a:spcPts val="800"/>
+              </a:spcAft>
+              <a:buSzPct val="100000"/>
+              <a:buChar char="•"/>
+            </a:pPr>
+            <a:r>
+              <a:rPr lang="en-US" sz="3600" dirty="0">
+                <a:solidFill>
+                  <a:srgbClr val="111111"/>
+                </a:solidFill>
+                <a:latin typeface="Times New Roman" pitchFamily="34" charset="0"/>
+                <a:ea typeface="Times New Roman" pitchFamily="34" charset="-122"/>
+                <a:cs typeface="Times New Roman" pitchFamily="34" charset="-120"/>
+              </a:rPr>
+              <a:t>A pole with a bucket lifts water.</a:t>
+            </a:r>
+            <a:endParaRPr lang="en-US" sz="3600" dirty="0"/>
           </a:p>
         </p:txBody>
       </p:sp>
       <p:pic>
         <p:nvPicPr>
-          <p:cNvPr id="3" name="Image 0" descr="/home/claude/f4/img/minesec_sheet.png">    </p:cNvPr>
+          <p:cNvPr id="5" name="Image 0" descr="/home/claude/f4/img/v2/f2t_shaduf.jpg">    </p:cNvPr>
           <p:cNvPicPr>
             <a:picLocks noChangeAspect="1"/>
           </p:cNvPicPr>
@@ -15062,8 +15626,8 @@
         </p:blipFill>
         <p:spPr>
           <a:xfrm>
-            <a:off x="0" y="658368"/>
-            <a:ext cx="5120640" cy="5833872"/>
+            <a:off x="5349240" y="2071212"/>
+            <a:ext cx="6659575" cy="3693983"/>
           </a:xfrm>
           <a:prstGeom prst="rect">
             <a:avLst/>
@@ -15072,14 +15636,14 @@
       </p:pic>
       <p:sp>
         <p:nvSpPr>
-          <p:cNvPr id="4" name="Text 1"/>
+          <p:cNvPr id="6" name="Text 3"/>
           <p:cNvSpPr/>
           <p:nvPr/>
         </p:nvSpPr>
         <p:spPr>
           <a:xfrm>
-            <a:off x="5349240" y="1005840"/>
-            <a:ext cx="6522415" cy="731520"/>
+            <a:off x="5349240" y="6089904"/>
+            <a:ext cx="6659575" cy="347472"/>
           </a:xfrm>
           <a:prstGeom prst="rect">
             <a:avLst/>
@@ -15088,68 +15652,24 @@
           <a:ln/>
         </p:spPr>
         <p:txBody>
-          <a:bodyPr wrap="square" lIns="0" tIns="0" rIns="0" bIns="0" rtlCol="0" anchor="ctr">
-            <a:normAutofit/>
-          </a:bodyPr>
+          <a:bodyPr wrap="square" lIns="0" tIns="0" rIns="0" bIns="0" rtlCol="0" anchor="ctr"/>
           <a:lstStyle/>
           <a:p>
             <a:pPr algn="ctr" indent="0" marL="0">
               <a:buNone/>
             </a:pPr>
             <a:r>
-              <a:rPr lang="en-US" sz="3600" b="1" dirty="0">
-                <a:solidFill>
-                  <a:srgbClr val="990011"/>
+              <a:rPr lang="en-US" sz="1600" i="1" dirty="0">
+                <a:solidFill>
+                  <a:srgbClr val="555555"/>
                 </a:solidFill>
                 <a:latin typeface="Times New Roman" pitchFamily="34" charset="0"/>
                 <a:ea typeface="Times New Roman" pitchFamily="34" charset="-122"/>
                 <a:cs typeface="Times New Roman" pitchFamily="34" charset="-120"/>
               </a:rPr>
-              <a:t>Evaluation 1</a:t>
-            </a:r>
-            <a:endParaRPr lang="en-US" sz="3600" dirty="0"/>
-          </a:p>
-        </p:txBody>
-      </p:sp>
-      <p:sp>
-        <p:nvSpPr>
-          <p:cNvPr id="5" name="Text 2"/>
-          <p:cNvSpPr/>
-          <p:nvPr/>
-        </p:nvSpPr>
-        <p:spPr>
-          <a:xfrm>
-            <a:off x="5349240" y="1783080"/>
-            <a:ext cx="6522415" cy="4663440"/>
-          </a:xfrm>
-          <a:prstGeom prst="rect">
-            <a:avLst/>
-          </a:prstGeom>
-          <a:noFill/>
-          <a:ln/>
-        </p:spPr>
-        <p:txBody>
-          <a:bodyPr wrap="square" lIns="0" tIns="0" rIns="0" bIns="0" rtlCol="0" anchor="t"/>
-          <a:lstStyle/>
-          <a:p>
-            <a:pPr algn="l" indent="0" marL="0">
-              <a:spcAft>
-                <a:spcPts val="800"/>
-              </a:spcAft>
-              <a:buNone/>
-            </a:pPr>
-            <a:r>
-              <a:rPr lang="en-US" sz="4000" dirty="0">
-                <a:solidFill>
-                  <a:srgbClr val="111111"/>
-                </a:solidFill>
-                <a:latin typeface="Times New Roman" pitchFamily="34" charset="0"/>
-                <a:ea typeface="Times New Roman" pitchFamily="34" charset="-122"/>
-                <a:cs typeface="Times New Roman" pitchFamily="34" charset="-120"/>
-              </a:rPr>
-              <a:t>What is an oasis?</a:t>
-            </a:r>
-            <a:endParaRPr lang="en-US" sz="4000" dirty="0"/>
+              <a:t>Illustration: a shaduf</a:t>
+            </a:r>
+            <a:endParaRPr lang="en-US" sz="1600" dirty="0"/>
           </a:p>
         </p:txBody>
       </p:sp>
@@ -15259,7 +15779,7 @@
                 <a:ea typeface="Calibri" pitchFamily="34" charset="-122"/>
                 <a:cs typeface="Calibri" pitchFamily="34" charset="-120"/>
               </a:rPr>
-              <a:t>FORMATIVE EVALUATION</a:t>
+              <a:t>BOARD SUMMARY</a:t>
             </a:r>
             <a:endParaRPr lang="en-US" sz="1400" dirty="0"/>
           </a:p>
@@ -15324,7 +15844,7 @@
                 <a:ea typeface="Times New Roman" pitchFamily="34" charset="-122"/>
                 <a:cs typeface="Times New Roman" pitchFamily="34" charset="-120"/>
               </a:rPr>
-              <a:t>Expected Answer</a:t>
+              <a:t>3. Irrigation in Deserts</a:t>
             </a:r>
             <a:endParaRPr lang="en-US" sz="3600" dirty="0"/>
           </a:p>
@@ -15351,14 +15871,15 @@
           <a:bodyPr wrap="square" lIns="0" tIns="0" rIns="0" bIns="0" rtlCol="0" anchor="t"/>
           <a:lstStyle/>
           <a:p>
-            <a:pPr algn="l" indent="0" marL="0">
+            <a:pPr algn="l" marL="342900" indent="-342900">
               <a:spcAft>
                 <a:spcPts val="800"/>
               </a:spcAft>
-              <a:buNone/>
+              <a:buSzPct val="100000"/>
+              <a:buChar char="•"/>
             </a:pPr>
             <a:r>
-              <a:rPr lang="en-US" sz="4000" dirty="0">
+              <a:rPr lang="en-US" sz="4000" b="1" dirty="0">
                 <a:solidFill>
                   <a:srgbClr val="111111"/>
                 </a:solidFill>
@@ -15366,7 +15887,64 @@
                 <a:ea typeface="Times New Roman" pitchFamily="34" charset="-122"/>
                 <a:cs typeface="Times New Roman" pitchFamily="34" charset="-120"/>
               </a:rPr>
-              <a:t>A green place in the desert where there is water.</a:t>
+              <a:t>Wells and boreholes: </a:t>
+            </a:r>
+            <a:pPr algn="l" marL="342900" indent="-342900">
+              <a:spcAft>
+                <a:spcPts val="800"/>
+              </a:spcAft>
+              <a:buSzPct val="100000"/>
+              <a:buChar char="•"/>
+            </a:pPr>
+            <a:r>
+              <a:rPr lang="en-US" sz="4000" dirty="0">
+                <a:solidFill>
+                  <a:srgbClr val="111111"/>
+                </a:solidFill>
+                <a:latin typeface="Times New Roman" pitchFamily="34" charset="0"/>
+                <a:ea typeface="Times New Roman" pitchFamily="34" charset="-122"/>
+                <a:cs typeface="Times New Roman" pitchFamily="34" charset="-120"/>
+              </a:rPr>
+              <a:t>Pumps lift underground water.</a:t>
+            </a:r>
+            <a:endParaRPr lang="en-US" sz="4000" dirty="0"/>
+          </a:p>
+          <a:p>
+            <a:pPr algn="l" marL="342900" indent="-342900">
+              <a:spcAft>
+                <a:spcPts val="800"/>
+              </a:spcAft>
+              <a:buSzPct val="100000"/>
+              <a:buChar char="•"/>
+            </a:pPr>
+            <a:r>
+              <a:rPr lang="en-US" sz="4000" b="1" dirty="0">
+                <a:solidFill>
+                  <a:srgbClr val="111111"/>
+                </a:solidFill>
+                <a:latin typeface="Times New Roman" pitchFamily="34" charset="0"/>
+                <a:ea typeface="Times New Roman" pitchFamily="34" charset="-122"/>
+                <a:cs typeface="Times New Roman" pitchFamily="34" charset="-120"/>
+              </a:rPr>
+              <a:t>Dams and canals: </a:t>
+            </a:r>
+            <a:pPr algn="l" marL="342900" indent="-342900">
+              <a:spcAft>
+                <a:spcPts val="800"/>
+              </a:spcAft>
+              <a:buSzPct val="100000"/>
+              <a:buChar char="•"/>
+            </a:pPr>
+            <a:r>
+              <a:rPr lang="en-US" sz="4000" dirty="0">
+                <a:solidFill>
+                  <a:srgbClr val="111111"/>
+                </a:solidFill>
+                <a:latin typeface="Times New Roman" pitchFamily="34" charset="0"/>
+                <a:ea typeface="Times New Roman" pitchFamily="34" charset="-122"/>
+                <a:cs typeface="Times New Roman" pitchFamily="34" charset="-120"/>
+              </a:rPr>
+              <a:t>The Aswan Dam stores Nile water for the fields.</a:t>
             </a:r>
             <a:endParaRPr lang="en-US" sz="4000" dirty="0"/>
           </a:p>
@@ -15478,15 +16056,117 @@
                 <a:ea typeface="Calibri" pitchFamily="34" charset="-122"/>
                 <a:cs typeface="Calibri" pitchFamily="34" charset="-120"/>
               </a:rPr>
-              <a:t>FORMATIVE EVALUATION</a:t>
+              <a:t>BOARD SUMMARY</a:t>
             </a:r>
             <a:endParaRPr lang="en-US" sz="1400" dirty="0"/>
+          </a:p>
+        </p:txBody>
+      </p:sp>
+      <p:sp>
+        <p:nvSpPr>
+          <p:cNvPr id="3" name="Text 1"/>
+          <p:cNvSpPr/>
+          <p:nvPr/>
+        </p:nvSpPr>
+        <p:spPr>
+          <a:xfrm>
+            <a:off x="365760" y="1005840"/>
+            <a:ext cx="11460175" cy="731520"/>
+          </a:xfrm>
+          <a:prstGeom prst="rect">
+            <a:avLst/>
+          </a:prstGeom>
+          <a:noFill/>
+          <a:ln/>
+        </p:spPr>
+        <p:txBody>
+          <a:bodyPr wrap="square" lIns="0" tIns="0" rIns="0" bIns="0" rtlCol="0" anchor="ctr">
+            <a:normAutofit/>
+          </a:bodyPr>
+          <a:lstStyle/>
+          <a:p>
+            <a:pPr algn="ctr" indent="0" marL="0">
+              <a:buNone/>
+            </a:pPr>
+            <a:r>
+              <a:rPr lang="en-US" sz="3600" b="1" dirty="0">
+                <a:solidFill>
+                  <a:srgbClr val="990011"/>
+                </a:solidFill>
+                <a:latin typeface="Times New Roman" pitchFamily="34" charset="0"/>
+                <a:ea typeface="Times New Roman" pitchFamily="34" charset="-122"/>
+                <a:cs typeface="Times New Roman" pitchFamily="34" charset="-120"/>
+              </a:rPr>
+              <a:t>3. Irrigation in Deserts</a:t>
+            </a:r>
+            <a:endParaRPr lang="en-US" sz="3600" dirty="0"/>
+          </a:p>
+        </p:txBody>
+      </p:sp>
+      <p:sp>
+        <p:nvSpPr>
+          <p:cNvPr id="4" name="Text 2"/>
+          <p:cNvSpPr/>
+          <p:nvPr/>
+        </p:nvSpPr>
+        <p:spPr>
+          <a:xfrm>
+            <a:off x="365760" y="1783080"/>
+            <a:ext cx="4846320" cy="4617720"/>
+          </a:xfrm>
+          <a:prstGeom prst="rect">
+            <a:avLst/>
+          </a:prstGeom>
+          <a:noFill/>
+          <a:ln/>
+        </p:spPr>
+        <p:txBody>
+          <a:bodyPr wrap="square" lIns="0" tIns="0" rIns="0" bIns="0" rtlCol="0" anchor="t"/>
+          <a:lstStyle/>
+          <a:p>
+            <a:pPr algn="l" marL="342900" indent="-342900">
+              <a:spcAft>
+                <a:spcPts val="800"/>
+              </a:spcAft>
+              <a:buSzPct val="100000"/>
+              <a:buChar char="•"/>
+            </a:pPr>
+            <a:r>
+              <a:rPr lang="en-US" sz="3600" b="1" dirty="0">
+                <a:solidFill>
+                  <a:srgbClr val="111111"/>
+                </a:solidFill>
+                <a:latin typeface="Times New Roman" pitchFamily="34" charset="0"/>
+                <a:ea typeface="Times New Roman" pitchFamily="34" charset="-122"/>
+                <a:cs typeface="Times New Roman" pitchFamily="34" charset="-120"/>
+              </a:rPr>
+              <a:t>Modern sprinklers: </a:t>
+            </a:r>
+            <a:pPr algn="l" marL="342900" indent="-342900">
+              <a:spcAft>
+                <a:spcPts val="800"/>
+              </a:spcAft>
+              <a:buSzPct val="100000"/>
+              <a:buChar char="•"/>
+            </a:pPr>
+            <a:r>
+              <a:rPr lang="en-US" sz="3600" dirty="0">
+                <a:solidFill>
+                  <a:srgbClr val="111111"/>
+                </a:solidFill>
+                <a:latin typeface="Times New Roman" pitchFamily="34" charset="0"/>
+                <a:ea typeface="Times New Roman" pitchFamily="34" charset="-122"/>
+                <a:cs typeface="Times New Roman" pitchFamily="34" charset="-120"/>
+              </a:rPr>
+              <a:t>Centre-pivot machines water large fields.</a:t>
+            </a:r>
+            <a:endParaRPr lang="en-US" sz="3600" dirty="0"/>
           </a:p>
         </p:txBody>
       </p:sp>
       <p:pic>
         <p:nvPicPr>
-          <p:cNvPr id="3" name="Image 0" descr="/home/claude/f4/img/minesec_sheet.png">    </p:cNvPr>
+          <p:cNvPr id="5" name="Image 0" descr="/home/claude/f4/img/v2/f2t_pivot.jpg">    </p:cNvPr>
           <p:cNvPicPr>
             <a:picLocks noChangeAspect="1"/>
           </p:cNvPicPr>
@@ -15500,8 +16180,8 @@
         </p:blipFill>
         <p:spPr>
           <a:xfrm>
-            <a:off x="0" y="658368"/>
-            <a:ext cx="5120640" cy="5833872"/>
+            <a:off x="5349240" y="2071212"/>
+            <a:ext cx="6659575" cy="3693983"/>
           </a:xfrm>
           <a:prstGeom prst="rect">
             <a:avLst/>
@@ -15510,14 +16190,14 @@
       </p:pic>
       <p:sp>
         <p:nvSpPr>
-          <p:cNvPr id="4" name="Text 1"/>
+          <p:cNvPr id="6" name="Text 3"/>
           <p:cNvSpPr/>
           <p:nvPr/>
         </p:nvSpPr>
         <p:spPr>
           <a:xfrm>
-            <a:off x="5349240" y="1005840"/>
-            <a:ext cx="6522415" cy="731520"/>
+            <a:off x="5349240" y="6089904"/>
+            <a:ext cx="6659575" cy="347472"/>
           </a:xfrm>
           <a:prstGeom prst="rect">
             <a:avLst/>
@@ -15526,68 +16206,24 @@
           <a:ln/>
         </p:spPr>
         <p:txBody>
-          <a:bodyPr wrap="square" lIns="0" tIns="0" rIns="0" bIns="0" rtlCol="0" anchor="ctr">
-            <a:normAutofit/>
-          </a:bodyPr>
+          <a:bodyPr wrap="square" lIns="0" tIns="0" rIns="0" bIns="0" rtlCol="0" anchor="ctr"/>
           <a:lstStyle/>
           <a:p>
             <a:pPr algn="ctr" indent="0" marL="0">
               <a:buNone/>
             </a:pPr>
             <a:r>
-              <a:rPr lang="en-US" sz="3600" b="1" dirty="0">
-                <a:solidFill>
-                  <a:srgbClr val="990011"/>
+              <a:rPr lang="en-US" sz="1600" i="1" dirty="0">
+                <a:solidFill>
+                  <a:srgbClr val="555555"/>
                 </a:solidFill>
                 <a:latin typeface="Times New Roman" pitchFamily="34" charset="0"/>
                 <a:ea typeface="Times New Roman" pitchFamily="34" charset="-122"/>
                 <a:cs typeface="Times New Roman" pitchFamily="34" charset="-120"/>
               </a:rPr>
-              <a:t>Evaluation 2</a:t>
-            </a:r>
-            <a:endParaRPr lang="en-US" sz="3600" dirty="0"/>
-          </a:p>
-        </p:txBody>
-      </p:sp>
-      <p:sp>
-        <p:nvSpPr>
-          <p:cNvPr id="5" name="Text 2"/>
-          <p:cNvSpPr/>
-          <p:nvPr/>
-        </p:nvSpPr>
-        <p:spPr>
-          <a:xfrm>
-            <a:off x="5349240" y="1783080"/>
-            <a:ext cx="6522415" cy="4663440"/>
-          </a:xfrm>
-          <a:prstGeom prst="rect">
-            <a:avLst/>
-          </a:prstGeom>
-          <a:noFill/>
-          <a:ln/>
-        </p:spPr>
-        <p:txBody>
-          <a:bodyPr wrap="square" lIns="0" tIns="0" rIns="0" bIns="0" rtlCol="0" anchor="t"/>
-          <a:lstStyle/>
-          <a:p>
-            <a:pPr algn="l" indent="0" marL="0">
-              <a:spcAft>
-                <a:spcPts val="800"/>
-              </a:spcAft>
-              <a:buNone/>
-            </a:pPr>
-            <a:r>
-              <a:rPr lang="en-US" sz="4000" dirty="0">
-                <a:solidFill>
-                  <a:srgbClr val="111111"/>
-                </a:solidFill>
-                <a:latin typeface="Times New Roman" pitchFamily="34" charset="0"/>
-                <a:ea typeface="Times New Roman" pitchFamily="34" charset="-122"/>
-                <a:cs typeface="Times New Roman" pitchFamily="34" charset="-120"/>
-              </a:rPr>
-              <a:t>Name two ways to get water in an oasis.</a:t>
-            </a:r>
-            <a:endParaRPr lang="en-US" sz="4000" dirty="0"/>
+              <a:t>Illustration: modern irrigation</a:t>
+            </a:r>
+            <a:endParaRPr lang="en-US" sz="1600" dirty="0"/>
           </a:p>
         </p:txBody>
       </p:sp>
@@ -15762,7 +16398,7 @@
                 <a:ea typeface="Times New Roman" pitchFamily="34" charset="-122"/>
                 <a:cs typeface="Times New Roman" pitchFamily="34" charset="-120"/>
               </a:rPr>
-              <a:t>Expected Answer</a:t>
+              <a:t>Evaluation 1</a:t>
             </a:r>
             <a:endParaRPr lang="en-US" sz="3600" dirty="0"/>
           </a:p>
@@ -15804,7 +16440,7 @@
                 <a:ea typeface="Times New Roman" pitchFamily="34" charset="-122"/>
                 <a:cs typeface="Times New Roman" pitchFamily="34" charset="-120"/>
               </a:rPr>
-              <a:t>Wells and the shaduf (or pumps).</a:t>
+              <a:t>What is an oasis?</a:t>
             </a:r>
             <a:endParaRPr lang="en-US" sz="4000" dirty="0"/>
           </a:p>
@@ -15916,7 +16552,7 @@
                 <a:ea typeface="Calibri" pitchFamily="34" charset="-122"/>
                 <a:cs typeface="Calibri" pitchFamily="34" charset="-120"/>
               </a:rPr>
-              <a:t>REMEDIATION</a:t>
+              <a:t>FORMATIVE EVALUATION</a:t>
             </a:r>
             <a:endParaRPr lang="en-US" sz="1400" dirty="0"/>
           </a:p>
@@ -15981,7 +16617,7 @@
                 <a:ea typeface="Times New Roman" pitchFamily="34" charset="-122"/>
                 <a:cs typeface="Times New Roman" pitchFamily="34" charset="-120"/>
               </a:rPr>
-              <a:t>Remediation</a:t>
+              <a:t>Expected Answer</a:t>
             </a:r>
             <a:endParaRPr lang="en-US" sz="3600" dirty="0"/>
           </a:p>
@@ -16015,7 +16651,7 @@
               <a:buNone/>
             </a:pPr>
             <a:r>
-              <a:rPr lang="en-US" sz="4000" b="1" dirty="0">
+              <a:rPr lang="en-US" sz="4000" dirty="0">
                 <a:solidFill>
                   <a:srgbClr val="111111"/>
                 </a:solidFill>
@@ -16023,51 +16659,7 @@
                 <a:ea typeface="Times New Roman" pitchFamily="34" charset="-122"/>
                 <a:cs typeface="Times New Roman" pitchFamily="34" charset="-120"/>
               </a:rPr>
-              <a:t>Fill in the blanks:</a:t>
-            </a:r>
-            <a:endParaRPr lang="en-US" sz="4000" dirty="0"/>
-          </a:p>
-          <a:p>
-            <a:pPr algn="l" marL="342900" indent="-342900">
-              <a:spcAft>
-                <a:spcPts val="800"/>
-              </a:spcAft>
-              <a:buSzPct val="100000"/>
-              <a:buFont typeface="+mj-lt"/>
-              <a:buAutoNum type="arabicPeriod" startAt="1"/>
-            </a:pPr>
-            <a:r>
-              <a:rPr lang="en-US" sz="4000" dirty="0">
-                <a:solidFill>
-                  <a:srgbClr val="111111"/>
-                </a:solidFill>
-                <a:latin typeface="Times New Roman" pitchFamily="34" charset="0"/>
-                <a:ea typeface="Times New Roman" pitchFamily="34" charset="-122"/>
-                <a:cs typeface="Times New Roman" pitchFamily="34" charset="-120"/>
-              </a:rPr>
-              <a:t>A green place with water in the desert is an ______.</a:t>
-            </a:r>
-            <a:endParaRPr lang="en-US" sz="4000" dirty="0"/>
-          </a:p>
-          <a:p>
-            <a:pPr algn="l" marL="342900" indent="-342900">
-              <a:spcAft>
-                <a:spcPts val="800"/>
-              </a:spcAft>
-              <a:buSzPct val="100000"/>
-              <a:buFont typeface="+mj-lt"/>
-              <a:buAutoNum type="arabicPeriod" startAt="1"/>
-            </a:pPr>
-            <a:r>
-              <a:rPr lang="en-US" sz="4000" dirty="0">
-                <a:solidFill>
-                  <a:srgbClr val="111111"/>
-                </a:solidFill>
-                <a:latin typeface="Times New Roman" pitchFamily="34" charset="0"/>
-                <a:ea typeface="Times New Roman" pitchFamily="34" charset="-122"/>
-                <a:cs typeface="Times New Roman" pitchFamily="34" charset="-120"/>
-              </a:rPr>
-              <a:t>The top layer of an oasis garden is the date ______.</a:t>
+              <a:t>A green place in the desert where there is water.</a:t>
             </a:r>
             <a:endParaRPr lang="en-US" sz="4000" dirty="0"/>
           </a:p>
@@ -16179,7 +16771,7 @@
                 <a:ea typeface="Calibri" pitchFamily="34" charset="-122"/>
                 <a:cs typeface="Calibri" pitchFamily="34" charset="-120"/>
               </a:rPr>
-              <a:t>REMEDIATION</a:t>
+              <a:t>FORMATIVE EVALUATION</a:t>
             </a:r>
             <a:endParaRPr lang="en-US" sz="1400" dirty="0"/>
           </a:p>
@@ -16244,7 +16836,7 @@
                 <a:ea typeface="Times New Roman" pitchFamily="34" charset="-122"/>
                 <a:cs typeface="Times New Roman" pitchFamily="34" charset="-120"/>
               </a:rPr>
-              <a:t>Remediation (continued)</a:t>
+              <a:t>Evaluation 2</a:t>
             </a:r>
             <a:endParaRPr lang="en-US" sz="3600" dirty="0"/>
           </a:p>
@@ -16271,13 +16863,11 @@
           <a:bodyPr wrap="square" lIns="0" tIns="0" rIns="0" bIns="0" rtlCol="0" anchor="t"/>
           <a:lstStyle/>
           <a:p>
-            <a:pPr algn="l" marL="342900" indent="-342900">
+            <a:pPr algn="l" indent="0" marL="0">
               <a:spcAft>
                 <a:spcPts val="800"/>
               </a:spcAft>
-              <a:buSzPct val="100000"/>
-              <a:buFont typeface="+mj-lt"/>
-              <a:buAutoNum type="arabicPeriod" startAt="1"/>
+              <a:buNone/>
             </a:pPr>
             <a:r>
               <a:rPr lang="en-US" sz="4000" dirty="0">
@@ -16288,7 +16878,7 @@
                 <a:ea typeface="Times New Roman" pitchFamily="34" charset="-122"/>
                 <a:cs typeface="Times New Roman" pitchFamily="34" charset="-120"/>
               </a:rPr>
-              <a:t>A pole with a bucket for lifting water is a ______.</a:t>
+              <a:t>Name two ways to get water in an oasis.</a:t>
             </a:r>
             <a:endParaRPr lang="en-US" sz="4000" dirty="0"/>
           </a:p>
@@ -16400,7 +16990,7 @@
                 <a:ea typeface="Calibri" pitchFamily="34" charset="-122"/>
                 <a:cs typeface="Calibri" pitchFamily="34" charset="-120"/>
               </a:rPr>
-              <a:t>HOMEWORK</a:t>
+              <a:t>FORMATIVE EVALUATION</a:t>
             </a:r>
             <a:endParaRPr lang="en-US" sz="1400" dirty="0"/>
           </a:p>
@@ -16465,7 +17055,7 @@
                 <a:ea typeface="Times New Roman" pitchFamily="34" charset="-122"/>
                 <a:cs typeface="Times New Roman" pitchFamily="34" charset="-120"/>
               </a:rPr>
-              <a:t>Homework</a:t>
+              <a:t>Expected Answer</a:t>
             </a:r>
             <a:endParaRPr lang="en-US" sz="3600" dirty="0"/>
           </a:p>
@@ -16507,7 +17097,7 @@
                 <a:ea typeface="Times New Roman" pitchFamily="34" charset="-122"/>
                 <a:cs typeface="Times New Roman" pitchFamily="34" charset="-120"/>
               </a:rPr>
-              <a:t>Look at a world map in your atlas. Find two countries located between 30° and 60° north of the Equator, and write their names.</a:t>
+              <a:t>Wells and the shaduf (or pumps).</a:t>
             </a:r>
             <a:endParaRPr lang="en-US" sz="4000" dirty="0"/>
           </a:p>
@@ -16619,7 +17209,7 @@
                 <a:ea typeface="Calibri" pitchFamily="34" charset="-122"/>
                 <a:cs typeface="Calibri" pitchFamily="34" charset="-120"/>
               </a:rPr>
-              <a:t>NEXT LESSON</a:t>
+              <a:t>REMEDIATION</a:t>
             </a:r>
             <a:endParaRPr lang="en-US" sz="1400" dirty="0"/>
           </a:p>
@@ -16684,7 +17274,7 @@
                 <a:ea typeface="Times New Roman" pitchFamily="34" charset="-122"/>
                 <a:cs typeface="Times New Roman" pitchFamily="34" charset="-120"/>
               </a:rPr>
-              <a:t>Next Lesson</a:t>
+              <a:t>Remediation</a:t>
             </a:r>
             <a:endParaRPr lang="en-US" sz="3600" dirty="0"/>
           </a:p>
@@ -16708,10 +17298,10 @@
           <a:ln/>
         </p:spPr>
         <p:txBody>
-          <a:bodyPr wrap="square" lIns="0" tIns="0" rIns="0" bIns="0" rtlCol="0" anchor="ctr"/>
-          <a:lstStyle/>
-          <a:p>
-            <a:pPr algn="ctr" indent="0" marL="0">
+          <a:bodyPr wrap="square" lIns="0" tIns="0" rIns="0" bIns="0" rtlCol="0" anchor="t"/>
+          <a:lstStyle/>
+          <a:p>
+            <a:pPr algn="l" indent="0" marL="0">
               <a:spcAft>
                 <a:spcPts val="800"/>
               </a:spcAft>
@@ -16726,27 +17316,51 @@
                 <a:ea typeface="Times New Roman" pitchFamily="34" charset="-122"/>
                 <a:cs typeface="Times New Roman" pitchFamily="34" charset="-120"/>
               </a:rPr>
-              <a:t>Our next lesson will be on:</a:t>
+              <a:t>Fill in the blanks:</a:t>
             </a:r>
             <a:endParaRPr lang="en-US" sz="4000" dirty="0"/>
           </a:p>
           <a:p>
-            <a:pPr algn="ctr" indent="0" marL="0">
+            <a:pPr algn="l" marL="342900" indent="-342900">
               <a:spcAft>
                 <a:spcPts val="800"/>
               </a:spcAft>
-              <a:buNone/>
+              <a:buSzPct val="100000"/>
+              <a:buFont typeface="+mj-lt"/>
+              <a:buAutoNum type="arabicPeriod" startAt="1"/>
             </a:pPr>
             <a:r>
-              <a:rPr lang="en-US" sz="4000" b="1" dirty="0">
-                <a:solidFill>
-                  <a:srgbClr val="990011"/>
+              <a:rPr lang="en-US" sz="4000" dirty="0">
+                <a:solidFill>
+                  <a:srgbClr val="111111"/>
                 </a:solidFill>
                 <a:latin typeface="Times New Roman" pitchFamily="34" charset="0"/>
                 <a:ea typeface="Times New Roman" pitchFamily="34" charset="-122"/>
                 <a:cs typeface="Times New Roman" pitchFamily="34" charset="-120"/>
               </a:rPr>
-              <a:t>Lesson 4 (Part 1): The Temperate Region: Location, Types and Characteristics (Climate)</a:t>
+              <a:t>A green place with water in the desert is an ______.</a:t>
+            </a:r>
+            <a:endParaRPr lang="en-US" sz="4000" dirty="0"/>
+          </a:p>
+          <a:p>
+            <a:pPr algn="l" marL="342900" indent="-342900">
+              <a:spcAft>
+                <a:spcPts val="800"/>
+              </a:spcAft>
+              <a:buSzPct val="100000"/>
+              <a:buFont typeface="+mj-lt"/>
+              <a:buAutoNum type="arabicPeriod" startAt="1"/>
+            </a:pPr>
+            <a:r>
+              <a:rPr lang="en-US" sz="4000" dirty="0">
+                <a:solidFill>
+                  <a:srgbClr val="111111"/>
+                </a:solidFill>
+                <a:latin typeface="Times New Roman" pitchFamily="34" charset="0"/>
+                <a:ea typeface="Times New Roman" pitchFamily="34" charset="-122"/>
+                <a:cs typeface="Times New Roman" pitchFamily="34" charset="-120"/>
+              </a:rPr>
+              <a:t>The top layer of an oasis garden is the date ______.</a:t>
             </a:r>
             <a:endParaRPr lang="en-US" sz="4000" dirty="0"/>
           </a:p>
@@ -16858,6 +17472,904 @@
                 <a:ea typeface="Calibri" pitchFamily="34" charset="-122"/>
                 <a:cs typeface="Calibri" pitchFamily="34" charset="-120"/>
               </a:rPr>
+              <a:t>REMEDIATION</a:t>
+            </a:r>
+            <a:endParaRPr lang="en-US" sz="1400" dirty="0"/>
+          </a:p>
+        </p:txBody>
+      </p:sp>
+      <p:pic>
+        <p:nvPicPr>
+          <p:cNvPr id="3" name="Image 0" descr="/home/claude/f4/img/minesec_sheet.png">    </p:cNvPr>
+          <p:cNvPicPr>
+            <a:picLocks noChangeAspect="1"/>
+          </p:cNvPicPr>
+          <p:nvPr/>
+        </p:nvPicPr>
+        <p:blipFill>
+          <a:blip r:embed="rId1"/>
+          <a:stretch>
+            <a:fillRect/>
+          </a:stretch>
+        </p:blipFill>
+        <p:spPr>
+          <a:xfrm>
+            <a:off x="0" y="658368"/>
+            <a:ext cx="5120640" cy="5833872"/>
+          </a:xfrm>
+          <a:prstGeom prst="rect">
+            <a:avLst/>
+          </a:prstGeom>
+        </p:spPr>
+      </p:pic>
+      <p:sp>
+        <p:nvSpPr>
+          <p:cNvPr id="4" name="Text 1"/>
+          <p:cNvSpPr/>
+          <p:nvPr/>
+        </p:nvSpPr>
+        <p:spPr>
+          <a:xfrm>
+            <a:off x="5349240" y="1005840"/>
+            <a:ext cx="6522415" cy="731520"/>
+          </a:xfrm>
+          <a:prstGeom prst="rect">
+            <a:avLst/>
+          </a:prstGeom>
+          <a:noFill/>
+          <a:ln/>
+        </p:spPr>
+        <p:txBody>
+          <a:bodyPr wrap="square" lIns="0" tIns="0" rIns="0" bIns="0" rtlCol="0" anchor="ctr">
+            <a:normAutofit/>
+          </a:bodyPr>
+          <a:lstStyle/>
+          <a:p>
+            <a:pPr algn="ctr" indent="0" marL="0">
+              <a:buNone/>
+            </a:pPr>
+            <a:r>
+              <a:rPr lang="en-US" sz="3600" b="1" dirty="0">
+                <a:solidFill>
+                  <a:srgbClr val="990011"/>
+                </a:solidFill>
+                <a:latin typeface="Times New Roman" pitchFamily="34" charset="0"/>
+                <a:ea typeface="Times New Roman" pitchFamily="34" charset="-122"/>
+                <a:cs typeface="Times New Roman" pitchFamily="34" charset="-120"/>
+              </a:rPr>
+              <a:t>Remediation (continued)</a:t>
+            </a:r>
+            <a:endParaRPr lang="en-US" sz="3600" dirty="0"/>
+          </a:p>
+        </p:txBody>
+      </p:sp>
+      <p:sp>
+        <p:nvSpPr>
+          <p:cNvPr id="5" name="Text 2"/>
+          <p:cNvSpPr/>
+          <p:nvPr/>
+        </p:nvSpPr>
+        <p:spPr>
+          <a:xfrm>
+            <a:off x="5349240" y="1783080"/>
+            <a:ext cx="6522415" cy="4663440"/>
+          </a:xfrm>
+          <a:prstGeom prst="rect">
+            <a:avLst/>
+          </a:prstGeom>
+          <a:noFill/>
+          <a:ln/>
+        </p:spPr>
+        <p:txBody>
+          <a:bodyPr wrap="square" lIns="0" tIns="0" rIns="0" bIns="0" rtlCol="0" anchor="t"/>
+          <a:lstStyle/>
+          <a:p>
+            <a:pPr algn="l" marL="342900" indent="-342900">
+              <a:spcAft>
+                <a:spcPts val="800"/>
+              </a:spcAft>
+              <a:buSzPct val="100000"/>
+              <a:buFont typeface="+mj-lt"/>
+              <a:buAutoNum type="arabicPeriod" startAt="1"/>
+            </a:pPr>
+            <a:r>
+              <a:rPr lang="en-US" sz="4000" dirty="0">
+                <a:solidFill>
+                  <a:srgbClr val="111111"/>
+                </a:solidFill>
+                <a:latin typeface="Times New Roman" pitchFamily="34" charset="0"/>
+                <a:ea typeface="Times New Roman" pitchFamily="34" charset="-122"/>
+                <a:cs typeface="Times New Roman" pitchFamily="34" charset="-120"/>
+              </a:rPr>
+              <a:t>A pole with a bucket for lifting water is a ______.</a:t>
+            </a:r>
+            <a:endParaRPr lang="en-US" sz="4000" dirty="0"/>
+          </a:p>
+        </p:txBody>
+      </p:sp>
+      <p:sp>
+        <p:nvSpPr>
+          <p:cNvPr id="25" name="Slide Number Placeholder 0"/>
+          <p:cNvSpPr>
+            <a:spLocks noGrp="1"/>
+          </p:cNvSpPr>
+          <p:nvPr>
+            <p:ph type="sldNum" sz="quarter" idx="4294967295"/>
+          </p:nvPr>
+        </p:nvSpPr>
+        <p:spPr>
+          <a:xfrm>
+            <a:off x="27432" y="91440"/>
+            <a:ext cx="585216" cy="475488"/>
+          </a:xfrm>
+          <a:prstGeom prst="rect">
+            <a:avLst/>
+          </a:prstGeom>
+          <a:extLst>
+            <a:ext uri="{C572A759-6A51-4108-AA02-DFA0A04FC94B}">
+              <ma14:wrappingTextBoxFlag xmlns:ma14="http://schemas.microsoft.com/office/mac/drawingml/2011/main" val="0"/>
+            </a:ext>
+          </a:extLst>
+        </p:spPr>
+        <p:txBody>
+          <a:bodyPr/>
+          <a:lstStyle>
+            <a:lvl1pPr>
+              <a:defRPr sz="2000">
+                <a:solidFill>
+                  <a:srgbClr val="FFFFFF"/>
+                </a:solidFill>
+                <a:latin typeface="Calibri"/>
+                <a:ea typeface="Calibri"/>
+                <a:cs typeface="Calibri"/>
+              </a:defRPr>
+            </a:lvl1pPr>
+          </a:lstStyle>
+          <a:p>
+            <a:pPr algn="ctr"/>
+            <a:fld id="{F7021451-1387-4CA6-816F-3879F97B5CBC}" type="slidenum">
+              <a:rPr b="1" lang="en-US"/>
+              <a:t>48</a:t>
+            </a:fld>
+            <a:endParaRPr lang="en-US"/>
+          </a:p>
+        </p:txBody>
+      </p:sp>
+    </p:spTree>
+  </p:cSld>
+  <p:clrMapOvr>
+    <a:masterClrMapping/>
+  </p:clrMapOvr>
+</p:sld>
+</file>
+
+<file path=ppt/slides/slide49.xml><?xml version="1.0" encoding="utf-8"?>
+<p:sld xmlns:a="http://schemas.openxmlformats.org/drawingml/2006/main" xmlns:r="http://schemas.openxmlformats.org/officeDocument/2006/relationships" xmlns:p="http://schemas.openxmlformats.org/presentationml/2006/main">
+  <p:cSld name="Slide 49">
+    <p:spTree>
+      <p:nvGrpSpPr>
+        <p:cNvPr id="1" name=""/>
+        <p:cNvGrpSpPr/>
+        <p:nvPr/>
+      </p:nvGrpSpPr>
+      <p:grpSpPr>
+        <a:xfrm>
+          <a:off x="0" y="0"/>
+          <a:ext cx="0" cy="0"/>
+          <a:chOff x="0" y="0"/>
+          <a:chExt cx="0" cy="0"/>
+        </a:xfrm>
+      </p:grpSpPr>
+      <p:sp>
+        <p:nvSpPr>
+          <p:cNvPr id="2" name="Text 0"/>
+          <p:cNvSpPr/>
+          <p:nvPr/>
+        </p:nvSpPr>
+        <p:spPr>
+          <a:xfrm>
+            <a:off x="457200" y="713232"/>
+            <a:ext cx="11368735" cy="274320"/>
+          </a:xfrm>
+          <a:prstGeom prst="rect">
+            <a:avLst/>
+          </a:prstGeom>
+          <a:noFill/>
+          <a:ln/>
+        </p:spPr>
+        <p:txBody>
+          <a:bodyPr wrap="square" lIns="0" tIns="0" rIns="0" bIns="0" rtlCol="0" anchor="ctr"/>
+          <a:lstStyle/>
+          <a:p>
+            <a:pPr algn="r" indent="0" marL="0">
+              <a:buNone/>
+            </a:pPr>
+            <a:r>
+              <a:rPr lang="en-US" sz="1400" b="1" dirty="0">
+                <a:solidFill>
+                  <a:srgbClr val="1C3F6E"/>
+                </a:solidFill>
+                <a:latin typeface="Calibri" pitchFamily="34" charset="0"/>
+                <a:ea typeface="Calibri" pitchFamily="34" charset="-122"/>
+                <a:cs typeface="Calibri" pitchFamily="34" charset="-120"/>
+              </a:rPr>
+              <a:t>HOMEWORK</a:t>
+            </a:r>
+            <a:endParaRPr lang="en-US" sz="1400" dirty="0"/>
+          </a:p>
+        </p:txBody>
+      </p:sp>
+      <p:pic>
+        <p:nvPicPr>
+          <p:cNvPr id="3" name="Image 0" descr="/home/claude/f4/img/minesec_sheet.png">    </p:cNvPr>
+          <p:cNvPicPr>
+            <a:picLocks noChangeAspect="1"/>
+          </p:cNvPicPr>
+          <p:nvPr/>
+        </p:nvPicPr>
+        <p:blipFill>
+          <a:blip r:embed="rId1"/>
+          <a:stretch>
+            <a:fillRect/>
+          </a:stretch>
+        </p:blipFill>
+        <p:spPr>
+          <a:xfrm>
+            <a:off x="0" y="658368"/>
+            <a:ext cx="5120640" cy="5833872"/>
+          </a:xfrm>
+          <a:prstGeom prst="rect">
+            <a:avLst/>
+          </a:prstGeom>
+        </p:spPr>
+      </p:pic>
+      <p:sp>
+        <p:nvSpPr>
+          <p:cNvPr id="4" name="Text 1"/>
+          <p:cNvSpPr/>
+          <p:nvPr/>
+        </p:nvSpPr>
+        <p:spPr>
+          <a:xfrm>
+            <a:off x="5349240" y="1005840"/>
+            <a:ext cx="6522415" cy="731520"/>
+          </a:xfrm>
+          <a:prstGeom prst="rect">
+            <a:avLst/>
+          </a:prstGeom>
+          <a:noFill/>
+          <a:ln/>
+        </p:spPr>
+        <p:txBody>
+          <a:bodyPr wrap="square" lIns="0" tIns="0" rIns="0" bIns="0" rtlCol="0" anchor="ctr">
+            <a:normAutofit/>
+          </a:bodyPr>
+          <a:lstStyle/>
+          <a:p>
+            <a:pPr algn="ctr" indent="0" marL="0">
+              <a:buNone/>
+            </a:pPr>
+            <a:r>
+              <a:rPr lang="en-US" sz="3600" b="1" dirty="0">
+                <a:solidFill>
+                  <a:srgbClr val="990011"/>
+                </a:solidFill>
+                <a:latin typeface="Times New Roman" pitchFamily="34" charset="0"/>
+                <a:ea typeface="Times New Roman" pitchFamily="34" charset="-122"/>
+                <a:cs typeface="Times New Roman" pitchFamily="34" charset="-120"/>
+              </a:rPr>
+              <a:t>Homework</a:t>
+            </a:r>
+            <a:endParaRPr lang="en-US" sz="3600" dirty="0"/>
+          </a:p>
+        </p:txBody>
+      </p:sp>
+      <p:sp>
+        <p:nvSpPr>
+          <p:cNvPr id="5" name="Text 2"/>
+          <p:cNvSpPr/>
+          <p:nvPr/>
+        </p:nvSpPr>
+        <p:spPr>
+          <a:xfrm>
+            <a:off x="5349240" y="1783080"/>
+            <a:ext cx="6522415" cy="4663440"/>
+          </a:xfrm>
+          <a:prstGeom prst="rect">
+            <a:avLst/>
+          </a:prstGeom>
+          <a:noFill/>
+          <a:ln/>
+        </p:spPr>
+        <p:txBody>
+          <a:bodyPr wrap="square" lIns="0" tIns="0" rIns="0" bIns="0" rtlCol="0" anchor="t"/>
+          <a:lstStyle/>
+          <a:p>
+            <a:pPr algn="l" indent="0" marL="0">
+              <a:spcAft>
+                <a:spcPts val="800"/>
+              </a:spcAft>
+              <a:buNone/>
+            </a:pPr>
+            <a:r>
+              <a:rPr lang="en-US" sz="4000" dirty="0">
+                <a:solidFill>
+                  <a:srgbClr val="111111"/>
+                </a:solidFill>
+                <a:latin typeface="Times New Roman" pitchFamily="34" charset="0"/>
+                <a:ea typeface="Times New Roman" pitchFamily="34" charset="-122"/>
+                <a:cs typeface="Times New Roman" pitchFamily="34" charset="-120"/>
+              </a:rPr>
+              <a:t>Look at a world map in your atlas. Find two countries located between 30° and 60° north of the Equator, and write their names.</a:t>
+            </a:r>
+            <a:endParaRPr lang="en-US" sz="4000" dirty="0"/>
+          </a:p>
+        </p:txBody>
+      </p:sp>
+      <p:sp>
+        <p:nvSpPr>
+          <p:cNvPr id="25" name="Slide Number Placeholder 0"/>
+          <p:cNvSpPr>
+            <a:spLocks noGrp="1"/>
+          </p:cNvSpPr>
+          <p:nvPr>
+            <p:ph type="sldNum" sz="quarter" idx="4294967295"/>
+          </p:nvPr>
+        </p:nvSpPr>
+        <p:spPr>
+          <a:xfrm>
+            <a:off x="27432" y="91440"/>
+            <a:ext cx="585216" cy="475488"/>
+          </a:xfrm>
+          <a:prstGeom prst="rect">
+            <a:avLst/>
+          </a:prstGeom>
+          <a:extLst>
+            <a:ext uri="{C572A759-6A51-4108-AA02-DFA0A04FC94B}">
+              <ma14:wrappingTextBoxFlag xmlns:ma14="http://schemas.microsoft.com/office/mac/drawingml/2011/main" val="0"/>
+            </a:ext>
+          </a:extLst>
+        </p:spPr>
+        <p:txBody>
+          <a:bodyPr/>
+          <a:lstStyle>
+            <a:lvl1pPr>
+              <a:defRPr sz="2000">
+                <a:solidFill>
+                  <a:srgbClr val="FFFFFF"/>
+                </a:solidFill>
+                <a:latin typeface="Calibri"/>
+                <a:ea typeface="Calibri"/>
+                <a:cs typeface="Calibri"/>
+              </a:defRPr>
+            </a:lvl1pPr>
+          </a:lstStyle>
+          <a:p>
+            <a:pPr algn="ctr"/>
+            <a:fld id="{F7021451-1387-4CA6-816F-3879F97B5CBC}" type="slidenum">
+              <a:rPr b="1" lang="en-US"/>
+              <a:t>49</a:t>
+            </a:fld>
+            <a:endParaRPr lang="en-US"/>
+          </a:p>
+        </p:txBody>
+      </p:sp>
+    </p:spTree>
+  </p:cSld>
+  <p:clrMapOvr>
+    <a:masterClrMapping/>
+  </p:clrMapOvr>
+</p:sld>
+</file>
+
+<file path=ppt/slides/slide5.xml><?xml version="1.0" encoding="utf-8"?>
+<p:sld xmlns:a="http://schemas.openxmlformats.org/drawingml/2006/main" xmlns:r="http://schemas.openxmlformats.org/officeDocument/2006/relationships" xmlns:p="http://schemas.openxmlformats.org/presentationml/2006/main">
+  <p:cSld name="Slide 5">
+    <p:spTree>
+      <p:nvGrpSpPr>
+        <p:cNvPr id="1" name=""/>
+        <p:cNvGrpSpPr/>
+        <p:nvPr/>
+      </p:nvGrpSpPr>
+      <p:grpSpPr>
+        <a:xfrm>
+          <a:off x="0" y="0"/>
+          <a:ext cx="0" cy="0"/>
+          <a:chOff x="0" y="0"/>
+          <a:chExt cx="0" cy="0"/>
+        </a:xfrm>
+      </p:grpSpPr>
+      <p:sp>
+        <p:nvSpPr>
+          <p:cNvPr id="2" name="Text 0"/>
+          <p:cNvSpPr/>
+          <p:nvPr/>
+        </p:nvSpPr>
+        <p:spPr>
+          <a:xfrm>
+            <a:off x="457200" y="713232"/>
+            <a:ext cx="11368735" cy="274320"/>
+          </a:xfrm>
+          <a:prstGeom prst="rect">
+            <a:avLst/>
+          </a:prstGeom>
+          <a:noFill/>
+          <a:ln/>
+        </p:spPr>
+        <p:txBody>
+          <a:bodyPr wrap="square" lIns="0" tIns="0" rIns="0" bIns="0" rtlCol="0" anchor="ctr"/>
+          <a:lstStyle/>
+          <a:p>
+            <a:pPr algn="r" indent="0" marL="0">
+              <a:buNone/>
+            </a:pPr>
+            <a:r>
+              <a:rPr lang="en-US" sz="1400" b="1" dirty="0">
+                <a:solidFill>
+                  <a:srgbClr val="1C3F6E"/>
+                </a:solidFill>
+                <a:latin typeface="Calibri" pitchFamily="34" charset="0"/>
+                <a:ea typeface="Calibri" pitchFamily="34" charset="-122"/>
+                <a:cs typeface="Calibri" pitchFamily="34" charset="-120"/>
+              </a:rPr>
+              <a:t>HOMEWORK CORRECTION</a:t>
+            </a:r>
+            <a:endParaRPr lang="en-US" sz="1400" dirty="0"/>
+          </a:p>
+        </p:txBody>
+      </p:sp>
+      <p:pic>
+        <p:nvPicPr>
+          <p:cNvPr id="3" name="Image 0" descr="/home/claude/f4/img/minesec_sheet.png">    </p:cNvPr>
+          <p:cNvPicPr>
+            <a:picLocks noChangeAspect="1"/>
+          </p:cNvPicPr>
+          <p:nvPr/>
+        </p:nvPicPr>
+        <p:blipFill>
+          <a:blip r:embed="rId1"/>
+          <a:stretch>
+            <a:fillRect/>
+          </a:stretch>
+        </p:blipFill>
+        <p:spPr>
+          <a:xfrm>
+            <a:off x="0" y="658368"/>
+            <a:ext cx="5120640" cy="5833872"/>
+          </a:xfrm>
+          <a:prstGeom prst="rect">
+            <a:avLst/>
+          </a:prstGeom>
+        </p:spPr>
+      </p:pic>
+      <p:sp>
+        <p:nvSpPr>
+          <p:cNvPr id="4" name="Text 1"/>
+          <p:cNvSpPr/>
+          <p:nvPr/>
+        </p:nvSpPr>
+        <p:spPr>
+          <a:xfrm>
+            <a:off x="5349240" y="1005840"/>
+            <a:ext cx="6522415" cy="731520"/>
+          </a:xfrm>
+          <a:prstGeom prst="rect">
+            <a:avLst/>
+          </a:prstGeom>
+          <a:noFill/>
+          <a:ln/>
+        </p:spPr>
+        <p:txBody>
+          <a:bodyPr wrap="square" lIns="0" tIns="0" rIns="0" bIns="0" rtlCol="0" anchor="ctr">
+            <a:normAutofit/>
+          </a:bodyPr>
+          <a:lstStyle/>
+          <a:p>
+            <a:pPr algn="ctr" indent="0" marL="0">
+              <a:buNone/>
+            </a:pPr>
+            <a:r>
+              <a:rPr lang="en-US" sz="3600" b="1" dirty="0">
+                <a:solidFill>
+                  <a:srgbClr val="990011"/>
+                </a:solidFill>
+                <a:latin typeface="Times New Roman" pitchFamily="34" charset="0"/>
+                <a:ea typeface="Times New Roman" pitchFamily="34" charset="-122"/>
+                <a:cs typeface="Times New Roman" pitchFamily="34" charset="-120"/>
+              </a:rPr>
+              <a:t>Correction: Possible Answer</a:t>
+            </a:r>
+            <a:endParaRPr lang="en-US" sz="3600" dirty="0"/>
+          </a:p>
+        </p:txBody>
+      </p:sp>
+      <p:sp>
+        <p:nvSpPr>
+          <p:cNvPr id="5" name="Text 2"/>
+          <p:cNvSpPr/>
+          <p:nvPr/>
+        </p:nvSpPr>
+        <p:spPr>
+          <a:xfrm>
+            <a:off x="5349240" y="1783080"/>
+            <a:ext cx="6522415" cy="4663440"/>
+          </a:xfrm>
+          <a:prstGeom prst="rect">
+            <a:avLst/>
+          </a:prstGeom>
+          <a:noFill/>
+          <a:ln/>
+        </p:spPr>
+        <p:txBody>
+          <a:bodyPr wrap="square" lIns="0" tIns="0" rIns="0" bIns="0" rtlCol="0" anchor="t"/>
+          <a:lstStyle/>
+          <a:p>
+            <a:pPr algn="l" indent="0" marL="0">
+              <a:spcAft>
+                <a:spcPts val="800"/>
+              </a:spcAft>
+              <a:buNone/>
+            </a:pPr>
+            <a:r>
+              <a:rPr lang="en-US" sz="4000" dirty="0">
+                <a:solidFill>
+                  <a:srgbClr val="111111"/>
+                </a:solidFill>
+                <a:latin typeface="Times New Roman" pitchFamily="34" charset="0"/>
+                <a:ea typeface="Times New Roman" pitchFamily="34" charset="-122"/>
+                <a:cs typeface="Times New Roman" pitchFamily="34" charset="-120"/>
+              </a:rPr>
+              <a:t>Examples: Siwa oasis in Egypt; Tafilalt oasis in Morocco; Kufra oasis in Libya; Bilma oasis in Niger.</a:t>
+            </a:r>
+            <a:endParaRPr lang="en-US" sz="4000" dirty="0"/>
+          </a:p>
+        </p:txBody>
+      </p:sp>
+      <p:sp>
+        <p:nvSpPr>
+          <p:cNvPr id="25" name="Slide Number Placeholder 0"/>
+          <p:cNvSpPr>
+            <a:spLocks noGrp="1"/>
+          </p:cNvSpPr>
+          <p:nvPr>
+            <p:ph type="sldNum" sz="quarter" idx="4294967295"/>
+          </p:nvPr>
+        </p:nvSpPr>
+        <p:spPr>
+          <a:xfrm>
+            <a:off x="27432" y="91440"/>
+            <a:ext cx="585216" cy="475488"/>
+          </a:xfrm>
+          <a:prstGeom prst="rect">
+            <a:avLst/>
+          </a:prstGeom>
+          <a:extLst>
+            <a:ext uri="{C572A759-6A51-4108-AA02-DFA0A04FC94B}">
+              <ma14:wrappingTextBoxFlag xmlns:ma14="http://schemas.microsoft.com/office/mac/drawingml/2011/main" val="0"/>
+            </a:ext>
+          </a:extLst>
+        </p:spPr>
+        <p:txBody>
+          <a:bodyPr/>
+          <a:lstStyle>
+            <a:lvl1pPr>
+              <a:defRPr sz="2000">
+                <a:solidFill>
+                  <a:srgbClr val="FFFFFF"/>
+                </a:solidFill>
+                <a:latin typeface="Calibri"/>
+                <a:ea typeface="Calibri"/>
+                <a:cs typeface="Calibri"/>
+              </a:defRPr>
+            </a:lvl1pPr>
+          </a:lstStyle>
+          <a:p>
+            <a:pPr algn="ctr"/>
+            <a:fld id="{F7021451-1387-4CA6-816F-3879F97B5CBC}" type="slidenum">
+              <a:rPr b="1" lang="en-US"/>
+              <a:t>5</a:t>
+            </a:fld>
+            <a:endParaRPr lang="en-US"/>
+          </a:p>
+        </p:txBody>
+      </p:sp>
+    </p:spTree>
+  </p:cSld>
+  <p:clrMapOvr>
+    <a:masterClrMapping/>
+  </p:clrMapOvr>
+</p:sld>
+</file>
+
+<file path=ppt/slides/slide50.xml><?xml version="1.0" encoding="utf-8"?>
+<p:sld xmlns:a="http://schemas.openxmlformats.org/drawingml/2006/main" xmlns:r="http://schemas.openxmlformats.org/officeDocument/2006/relationships" xmlns:p="http://schemas.openxmlformats.org/presentationml/2006/main">
+  <p:cSld name="Slide 50">
+    <p:spTree>
+      <p:nvGrpSpPr>
+        <p:cNvPr id="1" name=""/>
+        <p:cNvGrpSpPr/>
+        <p:nvPr/>
+      </p:nvGrpSpPr>
+      <p:grpSpPr>
+        <a:xfrm>
+          <a:off x="0" y="0"/>
+          <a:ext cx="0" cy="0"/>
+          <a:chOff x="0" y="0"/>
+          <a:chExt cx="0" cy="0"/>
+        </a:xfrm>
+      </p:grpSpPr>
+      <p:sp>
+        <p:nvSpPr>
+          <p:cNvPr id="2" name="Text 0"/>
+          <p:cNvSpPr/>
+          <p:nvPr/>
+        </p:nvSpPr>
+        <p:spPr>
+          <a:xfrm>
+            <a:off x="457200" y="713232"/>
+            <a:ext cx="11368735" cy="274320"/>
+          </a:xfrm>
+          <a:prstGeom prst="rect">
+            <a:avLst/>
+          </a:prstGeom>
+          <a:noFill/>
+          <a:ln/>
+        </p:spPr>
+        <p:txBody>
+          <a:bodyPr wrap="square" lIns="0" tIns="0" rIns="0" bIns="0" rtlCol="0" anchor="ctr"/>
+          <a:lstStyle/>
+          <a:p>
+            <a:pPr algn="r" indent="0" marL="0">
+              <a:buNone/>
+            </a:pPr>
+            <a:r>
+              <a:rPr lang="en-US" sz="1400" b="1" dirty="0">
+                <a:solidFill>
+                  <a:srgbClr val="1C3F6E"/>
+                </a:solidFill>
+                <a:latin typeface="Calibri" pitchFamily="34" charset="0"/>
+                <a:ea typeface="Calibri" pitchFamily="34" charset="-122"/>
+                <a:cs typeface="Calibri" pitchFamily="34" charset="-120"/>
+              </a:rPr>
+              <a:t>NEXT LESSON</a:t>
+            </a:r>
+            <a:endParaRPr lang="en-US" sz="1400" dirty="0"/>
+          </a:p>
+        </p:txBody>
+      </p:sp>
+      <p:pic>
+        <p:nvPicPr>
+          <p:cNvPr id="3" name="Image 0" descr="/home/claude/f4/img/minesec_sheet.png">    </p:cNvPr>
+          <p:cNvPicPr>
+            <a:picLocks noChangeAspect="1"/>
+          </p:cNvPicPr>
+          <p:nvPr/>
+        </p:nvPicPr>
+        <p:blipFill>
+          <a:blip r:embed="rId1"/>
+          <a:stretch>
+            <a:fillRect/>
+          </a:stretch>
+        </p:blipFill>
+        <p:spPr>
+          <a:xfrm>
+            <a:off x="0" y="658368"/>
+            <a:ext cx="5120640" cy="5833872"/>
+          </a:xfrm>
+          <a:prstGeom prst="rect">
+            <a:avLst/>
+          </a:prstGeom>
+        </p:spPr>
+      </p:pic>
+      <p:sp>
+        <p:nvSpPr>
+          <p:cNvPr id="4" name="Text 1"/>
+          <p:cNvSpPr/>
+          <p:nvPr/>
+        </p:nvSpPr>
+        <p:spPr>
+          <a:xfrm>
+            <a:off x="5349240" y="1005840"/>
+            <a:ext cx="6522415" cy="731520"/>
+          </a:xfrm>
+          <a:prstGeom prst="rect">
+            <a:avLst/>
+          </a:prstGeom>
+          <a:noFill/>
+          <a:ln/>
+        </p:spPr>
+        <p:txBody>
+          <a:bodyPr wrap="square" lIns="0" tIns="0" rIns="0" bIns="0" rtlCol="0" anchor="ctr">
+            <a:normAutofit/>
+          </a:bodyPr>
+          <a:lstStyle/>
+          <a:p>
+            <a:pPr algn="ctr" indent="0" marL="0">
+              <a:buNone/>
+            </a:pPr>
+            <a:r>
+              <a:rPr lang="en-US" sz="3600" b="1" dirty="0">
+                <a:solidFill>
+                  <a:srgbClr val="990011"/>
+                </a:solidFill>
+                <a:latin typeface="Times New Roman" pitchFamily="34" charset="0"/>
+                <a:ea typeface="Times New Roman" pitchFamily="34" charset="-122"/>
+                <a:cs typeface="Times New Roman" pitchFamily="34" charset="-120"/>
+              </a:rPr>
+              <a:t>Next Lesson</a:t>
+            </a:r>
+            <a:endParaRPr lang="en-US" sz="3600" dirty="0"/>
+          </a:p>
+        </p:txBody>
+      </p:sp>
+      <p:sp>
+        <p:nvSpPr>
+          <p:cNvPr id="5" name="Text 2"/>
+          <p:cNvSpPr/>
+          <p:nvPr/>
+        </p:nvSpPr>
+        <p:spPr>
+          <a:xfrm>
+            <a:off x="5349240" y="1783080"/>
+            <a:ext cx="6522415" cy="4663440"/>
+          </a:xfrm>
+          <a:prstGeom prst="rect">
+            <a:avLst/>
+          </a:prstGeom>
+          <a:noFill/>
+          <a:ln/>
+        </p:spPr>
+        <p:txBody>
+          <a:bodyPr wrap="square" lIns="0" tIns="0" rIns="0" bIns="0" rtlCol="0" anchor="ctr"/>
+          <a:lstStyle/>
+          <a:p>
+            <a:pPr algn="ctr" indent="0" marL="0">
+              <a:spcAft>
+                <a:spcPts val="800"/>
+              </a:spcAft>
+              <a:buNone/>
+            </a:pPr>
+            <a:r>
+              <a:rPr lang="en-US" sz="4000" b="1" dirty="0">
+                <a:solidFill>
+                  <a:srgbClr val="111111"/>
+                </a:solidFill>
+                <a:latin typeface="Times New Roman" pitchFamily="34" charset="0"/>
+                <a:ea typeface="Times New Roman" pitchFamily="34" charset="-122"/>
+                <a:cs typeface="Times New Roman" pitchFamily="34" charset="-120"/>
+              </a:rPr>
+              <a:t>Our next lesson will be on:</a:t>
+            </a:r>
+            <a:endParaRPr lang="en-US" sz="4000" dirty="0"/>
+          </a:p>
+          <a:p>
+            <a:pPr algn="ctr" indent="0" marL="0">
+              <a:spcAft>
+                <a:spcPts val="800"/>
+              </a:spcAft>
+              <a:buNone/>
+            </a:pPr>
+            <a:r>
+              <a:rPr lang="en-US" sz="4000" b="1" dirty="0">
+                <a:solidFill>
+                  <a:srgbClr val="990011"/>
+                </a:solidFill>
+                <a:latin typeface="Times New Roman" pitchFamily="34" charset="0"/>
+                <a:ea typeface="Times New Roman" pitchFamily="34" charset="-122"/>
+                <a:cs typeface="Times New Roman" pitchFamily="34" charset="-120"/>
+              </a:rPr>
+              <a:t>Lesson 4 (Part 1): The Temperate Region: Location, Types and Characteristics (Climate)</a:t>
+            </a:r>
+            <a:endParaRPr lang="en-US" sz="4000" dirty="0"/>
+          </a:p>
+        </p:txBody>
+      </p:sp>
+      <p:sp>
+        <p:nvSpPr>
+          <p:cNvPr id="25" name="Slide Number Placeholder 0"/>
+          <p:cNvSpPr>
+            <a:spLocks noGrp="1"/>
+          </p:cNvSpPr>
+          <p:nvPr>
+            <p:ph type="sldNum" sz="quarter" idx="4294967295"/>
+          </p:nvPr>
+        </p:nvSpPr>
+        <p:spPr>
+          <a:xfrm>
+            <a:off x="27432" y="91440"/>
+            <a:ext cx="585216" cy="475488"/>
+          </a:xfrm>
+          <a:prstGeom prst="rect">
+            <a:avLst/>
+          </a:prstGeom>
+          <a:extLst>
+            <a:ext uri="{C572A759-6A51-4108-AA02-DFA0A04FC94B}">
+              <ma14:wrappingTextBoxFlag xmlns:ma14="http://schemas.microsoft.com/office/mac/drawingml/2011/main" val="0"/>
+            </a:ext>
+          </a:extLst>
+        </p:spPr>
+        <p:txBody>
+          <a:bodyPr/>
+          <a:lstStyle>
+            <a:lvl1pPr>
+              <a:defRPr sz="2000">
+                <a:solidFill>
+                  <a:srgbClr val="FFFFFF"/>
+                </a:solidFill>
+                <a:latin typeface="Calibri"/>
+                <a:ea typeface="Calibri"/>
+                <a:cs typeface="Calibri"/>
+              </a:defRPr>
+            </a:lvl1pPr>
+          </a:lstStyle>
+          <a:p>
+            <a:pPr algn="ctr"/>
+            <a:fld id="{F7021451-1387-4CA6-816F-3879F97B5CBC}" type="slidenum">
+              <a:rPr b="1" lang="en-US"/>
+              <a:t>50</a:t>
+            </a:fld>
+            <a:endParaRPr lang="en-US"/>
+          </a:p>
+        </p:txBody>
+      </p:sp>
+    </p:spTree>
+  </p:cSld>
+  <p:clrMapOvr>
+    <a:masterClrMapping/>
+  </p:clrMapOvr>
+</p:sld>
+</file>
+
+<file path=ppt/slides/slide51.xml><?xml version="1.0" encoding="utf-8"?>
+<p:sld xmlns:a="http://schemas.openxmlformats.org/drawingml/2006/main" xmlns:r="http://schemas.openxmlformats.org/officeDocument/2006/relationships" xmlns:p="http://schemas.openxmlformats.org/presentationml/2006/main">
+  <p:cSld name="Slide 51">
+    <p:spTree>
+      <p:nvGrpSpPr>
+        <p:cNvPr id="1" name=""/>
+        <p:cNvGrpSpPr/>
+        <p:nvPr/>
+      </p:nvGrpSpPr>
+      <p:grpSpPr>
+        <a:xfrm>
+          <a:off x="0" y="0"/>
+          <a:ext cx="0" cy="0"/>
+          <a:chOff x="0" y="0"/>
+          <a:chExt cx="0" cy="0"/>
+        </a:xfrm>
+      </p:grpSpPr>
+      <p:sp>
+        <p:nvSpPr>
+          <p:cNvPr id="2" name="Text 0"/>
+          <p:cNvSpPr/>
+          <p:nvPr/>
+        </p:nvSpPr>
+        <p:spPr>
+          <a:xfrm>
+            <a:off x="457200" y="713232"/>
+            <a:ext cx="11368735" cy="274320"/>
+          </a:xfrm>
+          <a:prstGeom prst="rect">
+            <a:avLst/>
+          </a:prstGeom>
+          <a:noFill/>
+          <a:ln/>
+        </p:spPr>
+        <p:txBody>
+          <a:bodyPr wrap="square" lIns="0" tIns="0" rIns="0" bIns="0" rtlCol="0" anchor="ctr"/>
+          <a:lstStyle/>
+          <a:p>
+            <a:pPr algn="r" indent="0" marL="0">
+              <a:buNone/>
+            </a:pPr>
+            <a:r>
+              <a:rPr lang="en-US" sz="1400" b="1" dirty="0">
+                <a:solidFill>
+                  <a:srgbClr val="1C3F6E"/>
+                </a:solidFill>
+                <a:latin typeface="Calibri" pitchFamily="34" charset="0"/>
+                <a:ea typeface="Calibri" pitchFamily="34" charset="-122"/>
+                <a:cs typeface="Calibri" pitchFamily="34" charset="-120"/>
+              </a:rPr>
               <a:t>BILINGUAL GAME</a:t>
             </a:r>
             <a:endParaRPr lang="en-US" sz="1400" dirty="0"/>
@@ -16905,7 +18417,7 @@
       </p:sp>
       <p:graphicFrame>
         <p:nvGraphicFramePr>
-          <p:cNvPr id="49" name="Table 0"/>
+          <p:cNvPr id="52" name="Table 0"/>
           <p:cNvGraphicFramePr>
             <a:graphicFrameLocks noGrp="1"/>
           </p:cNvGraphicFramePr>
@@ -18217,7 +19729,7 @@
             <a:pPr algn="ctr"/>
             <a:fld id="{F7021451-1387-4CA6-816F-3879F97B5CBC}" type="slidenum">
               <a:rPr b="1" lang="en-US"/>
-              <a:t>48</a:t>
+              <a:t>51</a:t>
             </a:fld>
             <a:endParaRPr lang="en-US"/>
           </a:p>
@@ -18231,9 +19743,9 @@
 </p:sld>
 </file>
 
-<file path=ppt/slides/slide49.xml><?xml version="1.0" encoding="utf-8"?>
+<file path=ppt/slides/slide52.xml><?xml version="1.0" encoding="utf-8"?>
 <p:sld xmlns:a="http://schemas.openxmlformats.org/drawingml/2006/main" xmlns:r="http://schemas.openxmlformats.org/officeDocument/2006/relationships" xmlns:p="http://schemas.openxmlformats.org/presentationml/2006/main">
-  <p:cSld name="Slide 49">
+  <p:cSld name="Slide 52">
     <p:spTree>
       <p:nvGrpSpPr>
         <p:cNvPr id="1" name=""/>
@@ -18328,7 +19840,7 @@
       </p:sp>
       <p:graphicFrame>
         <p:nvGraphicFramePr>
-          <p:cNvPr id="50" name="Table 0"/>
+          <p:cNvPr id="53" name="Table 0"/>
           <p:cNvGraphicFramePr>
             <a:graphicFrameLocks noGrp="1"/>
           </p:cNvGraphicFramePr>
@@ -18950,7 +20462,7 @@
             <a:pPr algn="ctr"/>
             <a:fld id="{F7021451-1387-4CA6-816F-3879F97B5CBC}" type="slidenum">
               <a:rPr b="1" lang="en-US"/>
-              <a:t>49</a:t>
+              <a:t>52</a:t>
             </a:fld>
             <a:endParaRPr lang="en-US"/>
           </a:p>
@@ -18964,9 +20476,9 @@
 </p:sld>
 </file>
 
-<file path=ppt/slides/slide5.xml><?xml version="1.0" encoding="utf-8"?>
+<file path=ppt/slides/slide53.xml><?xml version="1.0" encoding="utf-8"?>
 <p:sld xmlns:a="http://schemas.openxmlformats.org/drawingml/2006/main" xmlns:r="http://schemas.openxmlformats.org/officeDocument/2006/relationships" xmlns:p="http://schemas.openxmlformats.org/presentationml/2006/main">
-  <p:cSld name="Slide 5">
+  <p:cSld name="Slide 53">
     <p:spTree>
       <p:nvGrpSpPr>
         <p:cNvPr id="1" name=""/>
@@ -19014,225 +20526,6 @@
                 <a:ea typeface="Calibri" pitchFamily="34" charset="-122"/>
                 <a:cs typeface="Calibri" pitchFamily="34" charset="-120"/>
               </a:rPr>
-              <a:t>HOMEWORK CORRECTION</a:t>
-            </a:r>
-            <a:endParaRPr lang="en-US" sz="1400" dirty="0"/>
-          </a:p>
-        </p:txBody>
-      </p:sp>
-      <p:pic>
-        <p:nvPicPr>
-          <p:cNvPr id="3" name="Image 0" descr="/home/claude/f4/img/minesec_sheet.png">    </p:cNvPr>
-          <p:cNvPicPr>
-            <a:picLocks noChangeAspect="1"/>
-          </p:cNvPicPr>
-          <p:nvPr/>
-        </p:nvPicPr>
-        <p:blipFill>
-          <a:blip r:embed="rId1"/>
-          <a:stretch>
-            <a:fillRect/>
-          </a:stretch>
-        </p:blipFill>
-        <p:spPr>
-          <a:xfrm>
-            <a:off x="0" y="658368"/>
-            <a:ext cx="5120640" cy="5833872"/>
-          </a:xfrm>
-          <a:prstGeom prst="rect">
-            <a:avLst/>
-          </a:prstGeom>
-        </p:spPr>
-      </p:pic>
-      <p:sp>
-        <p:nvSpPr>
-          <p:cNvPr id="4" name="Text 1"/>
-          <p:cNvSpPr/>
-          <p:nvPr/>
-        </p:nvSpPr>
-        <p:spPr>
-          <a:xfrm>
-            <a:off x="5349240" y="1005840"/>
-            <a:ext cx="6522415" cy="731520"/>
-          </a:xfrm>
-          <a:prstGeom prst="rect">
-            <a:avLst/>
-          </a:prstGeom>
-          <a:noFill/>
-          <a:ln/>
-        </p:spPr>
-        <p:txBody>
-          <a:bodyPr wrap="square" lIns="0" tIns="0" rIns="0" bIns="0" rtlCol="0" anchor="ctr">
-            <a:normAutofit/>
-          </a:bodyPr>
-          <a:lstStyle/>
-          <a:p>
-            <a:pPr algn="ctr" indent="0" marL="0">
-              <a:buNone/>
-            </a:pPr>
-            <a:r>
-              <a:rPr lang="en-US" sz="3600" b="1" dirty="0">
-                <a:solidFill>
-                  <a:srgbClr val="990011"/>
-                </a:solidFill>
-                <a:latin typeface="Times New Roman" pitchFamily="34" charset="0"/>
-                <a:ea typeface="Times New Roman" pitchFamily="34" charset="-122"/>
-                <a:cs typeface="Times New Roman" pitchFamily="34" charset="-120"/>
-              </a:rPr>
-              <a:t>Correction: Possible Answer</a:t>
-            </a:r>
-            <a:endParaRPr lang="en-US" sz="3600" dirty="0"/>
-          </a:p>
-        </p:txBody>
-      </p:sp>
-      <p:sp>
-        <p:nvSpPr>
-          <p:cNvPr id="5" name="Text 2"/>
-          <p:cNvSpPr/>
-          <p:nvPr/>
-        </p:nvSpPr>
-        <p:spPr>
-          <a:xfrm>
-            <a:off x="5349240" y="1783080"/>
-            <a:ext cx="6522415" cy="4663440"/>
-          </a:xfrm>
-          <a:prstGeom prst="rect">
-            <a:avLst/>
-          </a:prstGeom>
-          <a:noFill/>
-          <a:ln/>
-        </p:spPr>
-        <p:txBody>
-          <a:bodyPr wrap="square" lIns="0" tIns="0" rIns="0" bIns="0" rtlCol="0" anchor="t"/>
-          <a:lstStyle/>
-          <a:p>
-            <a:pPr algn="l" indent="0" marL="0">
-              <a:spcAft>
-                <a:spcPts val="800"/>
-              </a:spcAft>
-              <a:buNone/>
-            </a:pPr>
-            <a:r>
-              <a:rPr lang="en-US" sz="4000" dirty="0">
-                <a:solidFill>
-                  <a:srgbClr val="111111"/>
-                </a:solidFill>
-                <a:latin typeface="Times New Roman" pitchFamily="34" charset="0"/>
-                <a:ea typeface="Times New Roman" pitchFamily="34" charset="-122"/>
-                <a:cs typeface="Times New Roman" pitchFamily="34" charset="-120"/>
-              </a:rPr>
-              <a:t>Examples: Siwa oasis in Egypt; Tafilalt oasis in Morocco; Kufra oasis in Libya; Bilma oasis in Niger.</a:t>
-            </a:r>
-            <a:endParaRPr lang="en-US" sz="4000" dirty="0"/>
-          </a:p>
-        </p:txBody>
-      </p:sp>
-      <p:sp>
-        <p:nvSpPr>
-          <p:cNvPr id="25" name="Slide Number Placeholder 0"/>
-          <p:cNvSpPr>
-            <a:spLocks noGrp="1"/>
-          </p:cNvSpPr>
-          <p:nvPr>
-            <p:ph type="sldNum" sz="quarter" idx="4294967295"/>
-          </p:nvPr>
-        </p:nvSpPr>
-        <p:spPr>
-          <a:xfrm>
-            <a:off x="27432" y="91440"/>
-            <a:ext cx="585216" cy="475488"/>
-          </a:xfrm>
-          <a:prstGeom prst="rect">
-            <a:avLst/>
-          </a:prstGeom>
-          <a:extLst>
-            <a:ext uri="{C572A759-6A51-4108-AA02-DFA0A04FC94B}">
-              <ma14:wrappingTextBoxFlag xmlns:ma14="http://schemas.microsoft.com/office/mac/drawingml/2011/main" val="0"/>
-            </a:ext>
-          </a:extLst>
-        </p:spPr>
-        <p:txBody>
-          <a:bodyPr/>
-          <a:lstStyle>
-            <a:lvl1pPr>
-              <a:defRPr sz="2000">
-                <a:solidFill>
-                  <a:srgbClr val="FFFFFF"/>
-                </a:solidFill>
-                <a:latin typeface="Calibri"/>
-                <a:ea typeface="Calibri"/>
-                <a:cs typeface="Calibri"/>
-              </a:defRPr>
-            </a:lvl1pPr>
-          </a:lstStyle>
-          <a:p>
-            <a:pPr algn="ctr"/>
-            <a:fld id="{F7021451-1387-4CA6-816F-3879F97B5CBC}" type="slidenum">
-              <a:rPr b="1" lang="en-US"/>
-              <a:t>5</a:t>
-            </a:fld>
-            <a:endParaRPr lang="en-US"/>
-          </a:p>
-        </p:txBody>
-      </p:sp>
-    </p:spTree>
-  </p:cSld>
-  <p:clrMapOvr>
-    <a:masterClrMapping/>
-  </p:clrMapOvr>
-</p:sld>
-</file>
-
-<file path=ppt/slides/slide50.xml><?xml version="1.0" encoding="utf-8"?>
-<p:sld xmlns:a="http://schemas.openxmlformats.org/drawingml/2006/main" xmlns:r="http://schemas.openxmlformats.org/officeDocument/2006/relationships" xmlns:p="http://schemas.openxmlformats.org/presentationml/2006/main">
-  <p:cSld name="Slide 50">
-    <p:spTree>
-      <p:nvGrpSpPr>
-        <p:cNvPr id="1" name=""/>
-        <p:cNvGrpSpPr/>
-        <p:nvPr/>
-      </p:nvGrpSpPr>
-      <p:grpSpPr>
-        <a:xfrm>
-          <a:off x="0" y="0"/>
-          <a:ext cx="0" cy="0"/>
-          <a:chOff x="0" y="0"/>
-          <a:chExt cx="0" cy="0"/>
-        </a:xfrm>
-      </p:grpSpPr>
-      <p:sp>
-        <p:nvSpPr>
-          <p:cNvPr id="2" name="Text 0"/>
-          <p:cNvSpPr/>
-          <p:nvPr/>
-        </p:nvSpPr>
-        <p:spPr>
-          <a:xfrm>
-            <a:off x="457200" y="713232"/>
-            <a:ext cx="11368735" cy="274320"/>
-          </a:xfrm>
-          <a:prstGeom prst="rect">
-            <a:avLst/>
-          </a:prstGeom>
-          <a:noFill/>
-          <a:ln/>
-        </p:spPr>
-        <p:txBody>
-          <a:bodyPr wrap="square" lIns="0" tIns="0" rIns="0" bIns="0" rtlCol="0" anchor="ctr"/>
-          <a:lstStyle/>
-          <a:p>
-            <a:pPr algn="r" indent="0" marL="0">
-              <a:buNone/>
-            </a:pPr>
-            <a:r>
-              <a:rPr lang="en-US" sz="1400" b="1" dirty="0">
-                <a:solidFill>
-                  <a:srgbClr val="1C3F6E"/>
-                </a:solidFill>
-                <a:latin typeface="Calibri" pitchFamily="34" charset="0"/>
-                <a:ea typeface="Calibri" pitchFamily="34" charset="-122"/>
-                <a:cs typeface="Calibri" pitchFamily="34" charset="-120"/>
-              </a:rPr>
               <a:t>LOGBOOK</a:t>
             </a:r>
             <a:endParaRPr lang="en-US" sz="1400" dirty="0"/>
@@ -19280,7 +20573,7 @@
       </p:sp>
       <p:graphicFrame>
         <p:nvGraphicFramePr>
-          <p:cNvPr id="51" name="Table 0"/>
+          <p:cNvPr id="54" name="Table 0"/>
           <p:cNvGraphicFramePr>
             <a:graphicFrameLocks noGrp="1"/>
           </p:cNvGraphicFramePr>
@@ -19390,7 +20683,7 @@
                           <a:ea typeface="Calibri" pitchFamily="34" charset="-122"/>
                           <a:cs typeface="Calibri" pitchFamily="34" charset="-120"/>
                         </a:rPr>
-                        <a:t>The Oasis; Farming around Oases.</a:t>
+                        <a:t>DEFINITIONS; Formation of Oases; Farming around Oases; Irrigation in Deserts.</a:t>
                       </a:r>
                       <a:endParaRPr lang="en-US" sz="1600" dirty="0">
                         <a:latin typeface="Calibri" charset="0"/>
@@ -20040,7 +21333,7 @@
             <a:pPr algn="ctr"/>
             <a:fld id="{F7021451-1387-4CA6-816F-3879F97B5CBC}" type="slidenum">
               <a:rPr b="1" lang="en-US"/>
-              <a:t>50</a:t>
+              <a:t>53</a:t>
             </a:fld>
             <a:endParaRPr lang="en-US"/>
           </a:p>
@@ -20054,9 +21347,9 @@
 </p:sld>
 </file>
 
-<file path=ppt/slides/slide51.xml><?xml version="1.0" encoding="utf-8"?>
+<file path=ppt/slides/slide54.xml><?xml version="1.0" encoding="utf-8"?>
 <p:sld xmlns:a="http://schemas.openxmlformats.org/drawingml/2006/main" xmlns:r="http://schemas.openxmlformats.org/officeDocument/2006/relationships" xmlns:p="http://schemas.openxmlformats.org/presentationml/2006/main">
-  <p:cSld name="Slide 51">
+  <p:cSld name="Slide 54">
     <p:spTree>
       <p:nvGrpSpPr>
         <p:cNvPr id="1" name=""/>
@@ -20127,7 +21420,7 @@
         <p:spPr>
           <a:xfrm>
             <a:off x="0" y="658368"/>
-            <a:ext cx="2468880" cy="5833872"/>
+            <a:ext cx="3840480" cy="5833872"/>
           </a:xfrm>
           <a:prstGeom prst="rect">
             <a:avLst/>
@@ -20142,8 +21435,8 @@
         </p:nvSpPr>
         <p:spPr>
           <a:xfrm>
-            <a:off x="2697480" y="1005840"/>
-            <a:ext cx="9174175" cy="731520"/>
+            <a:off x="4069080" y="1005840"/>
+            <a:ext cx="7802575" cy="731520"/>
           </a:xfrm>
           <a:prstGeom prst="rect">
             <a:avLst/>
@@ -20183,8 +21476,8 @@
         </p:nvSpPr>
         <p:spPr>
           <a:xfrm>
-            <a:off x="2697480" y="1783080"/>
-            <a:ext cx="9174175" cy="4663440"/>
+            <a:off x="4069080" y="1783080"/>
+            <a:ext cx="7802575" cy="4663440"/>
           </a:xfrm>
           <a:prstGeom prst="rect">
             <a:avLst/>
@@ -20233,7 +21526,7 @@
                 <a:ea typeface="Calibri" pitchFamily="34" charset="-122"/>
                 <a:cs typeface="Calibri" pitchFamily="34" charset="-120"/>
               </a:rPr>
-              <a:t>Without the projector (Activity 1): describe an oasis: palm trees and water in the middle of the sand.</a:t>
+              <a:t>Without the projector (Activity 1): describe a green place in a dry area.</a:t>
             </a:r>
             <a:endParaRPr lang="en-US" sz="2000" dirty="0"/>
           </a:p>
@@ -20254,7 +21547,7 @@
                 <a:ea typeface="Calibri" pitchFamily="34" charset="-122"/>
                 <a:cs typeface="Calibri" pitchFamily="34" charset="-120"/>
               </a:rPr>
-              <a:t>Without the projector (Activity 2): draw the hills, the water under the ground and the oasis.</a:t>
+              <a:t>Without the projector (Activity 2): draw water under the sand.</a:t>
             </a:r>
             <a:endParaRPr lang="en-US" sz="2000" dirty="0"/>
           </a:p>
@@ -20275,7 +21568,7 @@
                 <a:ea typeface="Calibri" pitchFamily="34" charset="-122"/>
                 <a:cs typeface="Calibri" pitchFamily="34" charset="-120"/>
               </a:rPr>
-              <a:t>Without the projector (Activity 3): draw a palm tree, a small fruit tree and vegetables.</a:t>
+              <a:t>Without the projector (Activity 3): draw three layers.</a:t>
             </a:r>
             <a:endParaRPr lang="en-US" sz="2000" dirty="0"/>
           </a:p>
@@ -20296,7 +21589,7 @@
                 <a:ea typeface="Calibri" pitchFamily="34" charset="-122"/>
                 <a:cs typeface="Calibri" pitchFamily="34" charset="-120"/>
               </a:rPr>
-              <a:t>Without the projector (Activity 4): draw a shaduf: a pole, a weight and a bucket.</a:t>
+              <a:t>Without the projector (Activity 4): describe a bucket on a pole.</a:t>
             </a:r>
             <a:endParaRPr lang="en-US" sz="2000" dirty="0"/>
           </a:p>
@@ -20317,7 +21610,7 @@
                 <a:ea typeface="Calibri" pitchFamily="34" charset="-122"/>
                 <a:cs typeface="Calibri" pitchFamily="34" charset="-120"/>
               </a:rPr>
-              <a:t>Without the projector (Activity 5): explain that a pump brings water from deep under the ground.</a:t>
+              <a:t>Without the projector (Activity 5): describe a borehole.</a:t>
             </a:r>
             <a:endParaRPr lang="en-US" sz="2000" dirty="0"/>
           </a:p>
@@ -20365,7 +21658,7 @@
             <a:pPr algn="ctr"/>
             <a:fld id="{F7021451-1387-4CA6-816F-3879F97B5CBC}" type="slidenum">
               <a:rPr b="1" lang="en-US"/>
-              <a:t>51</a:t>
+              <a:t>54</a:t>
             </a:fld>
             <a:endParaRPr lang="en-US"/>
           </a:p>
@@ -20379,9 +21672,9 @@
 </p:sld>
 </file>
 
-<file path=ppt/slides/slide52.xml><?xml version="1.0" encoding="utf-8"?>
+<file path=ppt/slides/slide55.xml><?xml version="1.0" encoding="utf-8"?>
 <p:sld xmlns:a="http://schemas.openxmlformats.org/drawingml/2006/main" xmlns:r="http://schemas.openxmlformats.org/officeDocument/2006/relationships" xmlns:p="http://schemas.openxmlformats.org/presentationml/2006/main">
-  <p:cSld name="Slide 52">
+  <p:cSld name="Slide 55">
     <p:spTree>
       <p:nvGrpSpPr>
         <p:cNvPr id="1" name=""/>
@@ -20690,7 +21983,7 @@
             <a:pPr algn="ctr"/>
             <a:fld id="{F7021451-1387-4CA6-816F-3879F97B5CBC}" type="slidenum">
               <a:rPr b="1" lang="en-US"/>
-              <a:t>52</a:t>
+              <a:t>55</a:t>
             </a:fld>
             <a:endParaRPr lang="en-US"/>
           </a:p>

--- a/lecons/F2T/15_S09_L3_P5_Desert_Farming_Oases.pptx
+++ b/lecons/F2T/15_S09_L3_P5_Desert_Farming_Oases.pptx
@@ -3460,7 +3460,7 @@
           <a:p>
             <a:r>
               <a:rPr lang="en-US" dirty="0"/>
-              <a:t>Before we start the new lesson, let us correct the homework I gave you at the end of Lesson 3 (Part 4): The Desert Regions: Problems Faced and Adaptations. The question was: Find in your textbook or atlas the name of one oasis in the Sahara, and write the name of the country where it is found. Take out your exercise books.</a:t>
+              <a:t>Before we start the new lesson, let us correct the homework I gave you at the end of Lesson 3 (Part 4): The Desert Regions: Problems Faced and Adaptations. The question was: Define an oasis. Take out your exercise books.</a:t>
             </a:r>
             <a:endParaRPr lang="en-US" dirty="0"/>
           </a:p>
@@ -4340,7 +4340,7 @@
           <a:p>
             <a:r>
               <a:rPr lang="en-US" dirty="0"/>
-              <a:t>For your homework: Look at a world map in your atlas. Find two countries located between 30° and 60° north of the Equator, and write their names. We shall correct it at the beginning of our next lesson.</a:t>
+              <a:t>For your homework: Name the four seasons of the temperate region. We shall correct it at the beginning of our next lesson.</a:t>
             </a:r>
             <a:endParaRPr lang="en-US" dirty="0"/>
           </a:p>
@@ -4428,7 +4428,7 @@
           <a:p>
             <a:r>
               <a:rPr lang="en-US" dirty="0"/>
-              <a:t>Here is a good answer. Examples: Siwa oasis in Egypt; Tafilalt oasis in Morocco; Kufra oasis in Libya; Bilma oasis in Niger. Compare it with your own answer and correct your work in red.</a:t>
+              <a:t>Here is a good answer. It is a green, fertile place in a desert where water is found. Compare it with your own answer and correct your work in red.</a:t>
             </a:r>
             <a:endParaRPr lang="en-US" dirty="0"/>
           </a:p>
@@ -15266,7 +15266,7 @@
         <p:spPr>
           <a:xfrm>
             <a:off x="0" y="658368"/>
-            <a:ext cx="3840480" cy="5833872"/>
+            <a:ext cx="5120640" cy="5833872"/>
           </a:xfrm>
           <a:prstGeom prst="rect">
             <a:avLst/>
@@ -15281,8 +15281,8 @@
         </p:nvSpPr>
         <p:spPr>
           <a:xfrm>
-            <a:off x="4069080" y="1005840"/>
-            <a:ext cx="7802575" cy="731520"/>
+            <a:off x="5349240" y="1005840"/>
+            <a:ext cx="6522415" cy="731520"/>
           </a:xfrm>
           <a:prstGeom prst="rect">
             <a:avLst/>
@@ -15322,8 +15322,8 @@
         </p:nvSpPr>
         <p:spPr>
           <a:xfrm>
-            <a:off x="4069080" y="1783080"/>
-            <a:ext cx="7802575" cy="4663440"/>
+            <a:off x="5349240" y="1783080"/>
+            <a:ext cx="6522415" cy="4663440"/>
           </a:xfrm>
           <a:prstGeom prst="rect">
             <a:avLst/>
@@ -15370,7 +15370,7 @@
                 <a:ea typeface="Times New Roman" pitchFamily="34" charset="-122"/>
                 <a:cs typeface="Times New Roman" pitchFamily="34" charset="-120"/>
               </a:rPr>
-              <a:t>Find in your textbook or atlas the name of one oasis in the Sahara, and write the name of the country where it is found.</a:t>
+              <a:t>Define an oasis.</a:t>
             </a:r>
             <a:endParaRPr lang="en-US" sz="4000" dirty="0"/>
           </a:p>
@@ -17800,7 +17800,7 @@
                 <a:ea typeface="Times New Roman" pitchFamily="34" charset="-122"/>
                 <a:cs typeface="Times New Roman" pitchFamily="34" charset="-120"/>
               </a:rPr>
-              <a:t>Look at a world map in your atlas. Find two countries located between 30° and 60° north of the Equator, and write their names.</a:t>
+              <a:t>Name the four seasons of the temperate region.</a:t>
             </a:r>
             <a:endParaRPr lang="en-US" sz="4000" dirty="0"/>
           </a:p>
@@ -18019,7 +18019,7 @@
                 <a:ea typeface="Times New Roman" pitchFamily="34" charset="-122"/>
                 <a:cs typeface="Times New Roman" pitchFamily="34" charset="-120"/>
               </a:rPr>
-              <a:t>Examples: Siwa oasis in Egypt; Tafilalt oasis in Morocco; Kufra oasis in Libya; Bilma oasis in Niger.</a:t>
+              <a:t>It is a green, fertile place in a desert where water is found.</a:t>
             </a:r>
             <a:endParaRPr lang="en-US" sz="4000" dirty="0"/>
           </a:p>
@@ -20959,7 +20959,7 @@
                           <a:ea typeface="Calibri" pitchFamily="34" charset="-122"/>
                           <a:cs typeface="Calibri" pitchFamily="34" charset="-120"/>
                         </a:rPr>
-                        <a:t>Look at a world map in your atlas. Find two countries located between 30° and 60° north of the Equator, and write their names.</a:t>
+                        <a:t>Name the four seasons of the temperate region.</a:t>
                       </a:r>
                       <a:endParaRPr lang="en-US" sz="1600" dirty="0">
                         <a:latin typeface="Calibri" charset="0"/>
